--- a/system-design-101/vi/lessons/sd-06-014/slides/sd-06-014.pptx
+++ b/system-design-101/vi/lessons/sd-06-014/slides/sd-06-014.pptx
@@ -1868,18 +1868,123 @@
       </p:sp>
       <p:sp>
         <p:nvSpPr>
-          <p:cNvPr id="4" name="Shape 2"/>
-          <p:cNvSpPr/>
-          <p:nvPr/>
-        </p:nvSpPr>
-        <p:spPr>
-          <a:xfrm>
-            <a:off x="914400" y="5715000"/>
-            <a:ext cx="4000500" cy="1219200"/>
+          <p:cNvPr id="4" name="Text 2"/>
+          <p:cNvSpPr/>
+          <p:nvPr/>
+        </p:nvSpPr>
+        <p:spPr>
+          <a:xfrm>
+            <a:off x="914400" y="5238750"/>
+            <a:ext cx="16459200" cy="571500"/>
+          </a:xfrm>
+          <a:prstGeom prst="rect">
+            <a:avLst/>
+          </a:prstGeom>
+          <a:noFill/>
+          <a:ln/>
+        </p:spPr>
+        <p:txBody>
+          <a:bodyPr wrap="square" lIns="0" tIns="0" rIns="0" bIns="0" rtlCol="0" anchor="ctr"/>
+          <a:lstStyle/>
+          <a:p>
+            <a:pPr algn="l" indent="0" marL="0">
+              <a:buNone/>
+            </a:pPr>
+            <a:r>
+              <a:rPr lang="en-US" sz="3000" dirty="0" spc="-9" kern="0">
+                <a:solidFill>
+                  <a:srgbClr val="E4E1D8"/>
+                </a:solidFill>
+                <a:latin typeface="Be Vietnam Pro" pitchFamily="34" charset="0"/>
+                <a:ea typeface="Be Vietnam Pro" pitchFamily="34" charset="-122"/>
+                <a:cs typeface="Be Vietnam Pro" pitchFamily="34" charset="-120"/>
+              </a:rPr>
+              <a:t>volatile-lru</a:t>
+            </a:r>
+            <a:r>
+              <a:rPr lang="en-US" sz="3000" dirty="0" spc="1" kern="0">
+                <a:solidFill>
+                  <a:srgbClr val="E4E1D8"/>
+                </a:solidFill>
+                <a:latin typeface="Be Vietnam Pro" pitchFamily="34" charset="0"/>
+                <a:ea typeface="Be Vietnam Pro" pitchFamily="34" charset="-122"/>
+                <a:cs typeface="Be Vietnam Pro" pitchFamily="34" charset="-120"/>
+              </a:rPr>
+              <a:t> đầy:</a:t>
+            </a:r>
+            <a:r>
+              <a:rPr lang="en-US" sz="3000" dirty="0" spc="-1" kern="0">
+                <a:solidFill>
+                  <a:srgbClr val="E4E1D8"/>
+                </a:solidFill>
+                <a:latin typeface="Be Vietnam Pro" pitchFamily="34" charset="0"/>
+                <a:ea typeface="Be Vietnam Pro" pitchFamily="34" charset="-122"/>
+                <a:cs typeface="Be Vietnam Pro" pitchFamily="34" charset="-120"/>
+              </a:rPr>
+              <a:t> khóa</a:t>
+            </a:r>
+            <a:r>
+              <a:rPr lang="en-US" sz="3000" dirty="0" spc="-2" kern="0">
+                <a:solidFill>
+                  <a:srgbClr val="E4E1D8"/>
+                </a:solidFill>
+                <a:latin typeface="Be Vietnam Pro" pitchFamily="34" charset="0"/>
+                <a:ea typeface="Be Vietnam Pro" pitchFamily="34" charset="-122"/>
+                <a:cs typeface="Be Vietnam Pro" pitchFamily="34" charset="-120"/>
+              </a:rPr>
+              <a:t> nào</a:t>
+            </a:r>
+            <a:r>
+              <a:rPr lang="en-US" sz="3000" dirty="0" spc="4" kern="0">
+                <a:solidFill>
+                  <a:srgbClr val="E4E1D8"/>
+                </a:solidFill>
+                <a:latin typeface="Be Vietnam Pro" pitchFamily="34" charset="0"/>
+                <a:ea typeface="Be Vietnam Pro" pitchFamily="34" charset="-122"/>
+                <a:cs typeface="Be Vietnam Pro" pitchFamily="34" charset="-120"/>
+              </a:rPr>
+              <a:t> bị</a:t>
+            </a:r>
+            <a:r>
+              <a:rPr lang="en-US" sz="3000" dirty="0" spc="3" kern="0">
+                <a:solidFill>
+                  <a:srgbClr val="E4E1D8"/>
+                </a:solidFill>
+                <a:latin typeface="Be Vietnam Pro" pitchFamily="34" charset="0"/>
+                <a:ea typeface="Be Vietnam Pro" pitchFamily="34" charset="-122"/>
+                <a:cs typeface="Be Vietnam Pro" pitchFamily="34" charset="-120"/>
+              </a:rPr>
+              <a:t> đẩy</a:t>
+            </a:r>
+            <a:r>
+              <a:rPr lang="en-US" sz="3000" dirty="0" spc="-30" kern="0">
+                <a:solidFill>
+                  <a:srgbClr val="E4E1D8"/>
+                </a:solidFill>
+                <a:latin typeface="Be Vietnam Pro" pitchFamily="34" charset="0"/>
+                <a:ea typeface="Be Vietnam Pro" pitchFamily="34" charset="-122"/>
+                <a:cs typeface="Be Vietnam Pro" pitchFamily="34" charset="-120"/>
+              </a:rPr>
+              <a:t> ra?</a:t>
+            </a:r>
+            <a:endParaRPr lang="en-US" sz="3000" dirty="0"/>
+          </a:p>
+        </p:txBody>
+      </p:sp>
+      <p:sp>
+        <p:nvSpPr>
+          <p:cNvPr id="5" name="Shape 3"/>
+          <p:cNvSpPr/>
+          <p:nvPr/>
+        </p:nvSpPr>
+        <p:spPr>
+          <a:xfrm>
+            <a:off x="914400" y="6286500"/>
+            <a:ext cx="5181600" cy="2095500"/>
           </a:xfrm>
           <a:prstGeom prst="roundRect">
             <a:avLst>
-              <a:gd name="adj" fmla="val 18750"/>
+              <a:gd name="adj" fmla="val 10909"/>
             </a:avLst>
           </a:prstGeom>
           <a:solidFill>
@@ -1895,14 +2000,14 @@
       </p:sp>
       <p:sp>
         <p:nvSpPr>
-          <p:cNvPr id="5" name="Text 3"/>
-          <p:cNvSpPr/>
-          <p:nvPr/>
-        </p:nvSpPr>
-        <p:spPr>
-          <a:xfrm>
-            <a:off x="1181100" y="5715000"/>
-            <a:ext cx="2286000" cy="1219200"/>
+          <p:cNvPr id="6" name="Text 4"/>
+          <p:cNvSpPr/>
+          <p:nvPr/>
+        </p:nvSpPr>
+        <p:spPr>
+          <a:xfrm>
+            <a:off x="1257300" y="6572250"/>
+            <a:ext cx="4572000" cy="666750"/>
           </a:xfrm>
           <a:prstGeom prst="rect">
             <a:avLst/>
@@ -1918,15 +2023,48 @@
               <a:buNone/>
             </a:pPr>
             <a:r>
-              <a:rPr lang="en-US" sz="3300" dirty="0" spc="-12" kern="0">
-                <a:solidFill>
-                  <a:srgbClr val="F3EEE3"/>
+              <a:rPr lang="en-US" sz="3300" dirty="0" spc="-74" kern="0">
+                <a:solidFill>
+                  <a:srgbClr val="3DD6A0"/>
                 </a:solidFill>
                 <a:latin typeface="Bricolage Grotesque ExtraBold" pitchFamily="34" charset="0"/>
                 <a:ea typeface="Bricolage Grotesque ExtraBold" pitchFamily="34" charset="-122"/>
                 <a:cs typeface="Bricolage Grotesque ExtraBold" pitchFamily="34" charset="-120"/>
               </a:rPr>
-              <a:t>LRU</a:t>
+              <a:t>Tám</a:t>
+            </a:r>
+            <a:r>
+              <a:rPr lang="en-US" sz="3300" dirty="0" spc="-11" kern="0">
+                <a:solidFill>
+                  <a:srgbClr val="3DD6A0"/>
+                </a:solidFill>
+                <a:latin typeface="Bricolage Grotesque ExtraBold" pitchFamily="34" charset="0"/>
+                <a:ea typeface="Bricolage Grotesque ExtraBold" pitchFamily="34" charset="-122"/>
+                <a:cs typeface="Bricolage Grotesque ExtraBold" pitchFamily="34" charset="-120"/>
+              </a:rPr>
+              <a:t> tên</a:t>
+            </a:r>
+            <a:r>
+              <a:rPr lang="en-US" sz="3300" dirty="0" spc="-35" kern="0">
+                <a:solidFill>
+                  <a:srgbClr val="3DD6A0"/>
+                </a:solidFill>
+                <a:latin typeface="Bricolage Grotesque ExtraBold" pitchFamily="34" charset="0"/>
+                <a:ea typeface="Bricolage Grotesque ExtraBold" pitchFamily="34" charset="-122"/>
+                <a:cs typeface="Bricolage Grotesque ExtraBold" pitchFamily="34" charset="-120"/>
+              </a:rPr>
+              <a:t> và</a:t>
+            </a:r>
+            <a:r>
+              <a:rPr lang="en-US" sz="3300" dirty="0" spc="-9" kern="0">
+                <a:solidFill>
+                  <a:srgbClr val="3DD6A0"/>
+                </a:solidFill>
+                <a:latin typeface="Bricolage Grotesque ExtraBold" pitchFamily="34" charset="0"/>
+                <a:ea typeface="Bricolage Grotesque ExtraBold" pitchFamily="34" charset="-122"/>
+                <a:cs typeface="Bricolage Grotesque ExtraBold" pitchFamily="34" charset="-120"/>
+              </a:rPr>
+              <a:t> Redis</a:t>
             </a:r>
             <a:endParaRPr lang="en-US" sz="3300" dirty="0"/>
           </a:p>
@@ -1934,14 +2072,14 @@
       </p:sp>
       <p:sp>
         <p:nvSpPr>
-          <p:cNvPr id="6" name="Text 4"/>
-          <p:cNvSpPr/>
-          <p:nvPr/>
-        </p:nvSpPr>
-        <p:spPr>
-          <a:xfrm>
-            <a:off x="3200400" y="5715000"/>
-            <a:ext cx="1485900" cy="1219200"/>
+          <p:cNvPr id="7" name="Text 5"/>
+          <p:cNvSpPr/>
+          <p:nvPr/>
+        </p:nvSpPr>
+        <p:spPr>
+          <a:xfrm>
+            <a:off x="1257300" y="7334250"/>
+            <a:ext cx="4572000" cy="800100"/>
           </a:xfrm>
           <a:prstGeom prst="rect">
             <a:avLst/>
@@ -1950,455 +2088,99 @@
           <a:ln/>
         </p:spPr>
         <p:txBody>
-          <a:bodyPr wrap="square" lIns="0" tIns="0" rIns="0" bIns="0" rtlCol="0" anchor="ctr"/>
-          <a:lstStyle/>
-          <a:p>
-            <a:pPr algn="r" indent="0" marL="0">
-              <a:buNone/>
-            </a:pPr>
-            <a:r>
-              <a:rPr lang="en-US" sz="1800" b="1" dirty="0" spc="-10" kern="0">
-                <a:solidFill>
-                  <a:srgbClr val="3DD6A0"/>
-                </a:solidFill>
-                <a:latin typeface="Be Vietnam Pro" pitchFamily="34" charset="0"/>
-                <a:ea typeface="Be Vietnam Pro" pitchFamily="34" charset="-122"/>
-                <a:cs typeface="Be Vietnam Pro" pitchFamily="34" charset="-120"/>
-              </a:rPr>
-              <a:t>có</a:t>
-            </a:r>
-            <a:r>
-              <a:rPr lang="en-US" sz="1800" b="1" dirty="0" spc="-11" kern="0">
-                <a:solidFill>
-                  <a:srgbClr val="3DD6A0"/>
-                </a:solidFill>
-                <a:latin typeface="Be Vietnam Pro" pitchFamily="34" charset="0"/>
-                <a:ea typeface="Be Vietnam Pro" pitchFamily="34" charset="-122"/>
-                <a:cs typeface="Be Vietnam Pro" pitchFamily="34" charset="-120"/>
-              </a:rPr>
-              <a:t> trong</a:t>
-            </a:r>
-            <a:r>
-              <a:rPr lang="en-US" sz="1800" b="1" dirty="0" spc="-17" kern="0">
-                <a:solidFill>
-                  <a:srgbClr val="3DD6A0"/>
-                </a:solidFill>
-                <a:latin typeface="Be Vietnam Pro" pitchFamily="34" charset="0"/>
-                <a:ea typeface="Be Vietnam Pro" pitchFamily="34" charset="-122"/>
-                <a:cs typeface="Be Vietnam Pro" pitchFamily="34" charset="-120"/>
-              </a:rPr>
-              <a:t> Redis</a:t>
-            </a:r>
-            <a:endParaRPr lang="en-US" sz="1800" dirty="0"/>
-          </a:p>
-        </p:txBody>
-      </p:sp>
-      <p:sp>
-        <p:nvSpPr>
-          <p:cNvPr id="7" name="Shape 5"/>
-          <p:cNvSpPr/>
-          <p:nvPr/>
-        </p:nvSpPr>
-        <p:spPr>
-          <a:xfrm>
-            <a:off x="5143500" y="5715000"/>
-            <a:ext cx="4000500" cy="1219200"/>
-          </a:xfrm>
-          <a:prstGeom prst="roundRect">
-            <a:avLst>
-              <a:gd name="adj" fmla="val 18750"/>
-            </a:avLst>
-          </a:prstGeom>
-          <a:solidFill>
-            <a:srgbClr val="1E212B"/>
-          </a:solidFill>
-          <a:ln w="28575">
-            <a:solidFill>
-              <a:srgbClr val="3DD6A0"/>
-            </a:solidFill>
-            <a:prstDash val="solid"/>
-          </a:ln>
-        </p:spPr>
-      </p:sp>
-      <p:sp>
-        <p:nvSpPr>
-          <p:cNvPr id="8" name="Text 6"/>
-          <p:cNvSpPr/>
-          <p:nvPr/>
-        </p:nvSpPr>
-        <p:spPr>
-          <a:xfrm>
-            <a:off x="5410200" y="5715000"/>
-            <a:ext cx="2286000" cy="1219200"/>
-          </a:xfrm>
-          <a:prstGeom prst="rect">
-            <a:avLst/>
-          </a:prstGeom>
-          <a:noFill/>
-          <a:ln/>
-        </p:spPr>
-        <p:txBody>
-          <a:bodyPr wrap="square" lIns="0" tIns="0" rIns="0" bIns="0" rtlCol="0" anchor="ctr"/>
+          <a:bodyPr wrap="square" lIns="0" tIns="11335" rIns="0" bIns="-11335" rtlCol="0" anchor="t"/>
           <a:lstStyle/>
           <a:p>
             <a:pPr algn="l" indent="0" marL="0">
+              <a:lnSpc>
+                <a:spcPts val="2730"/>
+              </a:lnSpc>
               <a:buNone/>
             </a:pPr>
             <a:r>
-              <a:rPr lang="en-US" sz="3300" dirty="0" spc="-2" kern="0">
-                <a:solidFill>
-                  <a:srgbClr val="F3EEE3"/>
-                </a:solidFill>
-                <a:latin typeface="Bricolage Grotesque ExtraBold" pitchFamily="34" charset="0"/>
-                <a:ea typeface="Bricolage Grotesque ExtraBold" pitchFamily="34" charset="-122"/>
-                <a:cs typeface="Bricolage Grotesque ExtraBold" pitchFamily="34" charset="-120"/>
-              </a:rPr>
-              <a:t>LFU</a:t>
-            </a:r>
-            <a:endParaRPr lang="en-US" sz="3300" dirty="0"/>
+              <a:rPr lang="en-US" sz="2100" dirty="0" spc="-7" kern="0">
+                <a:solidFill>
+                  <a:srgbClr val="E4E1D8"/>
+                </a:solidFill>
+                <a:latin typeface="Be Vietnam Pro" pitchFamily="34" charset="0"/>
+                <a:ea typeface="Be Vietnam Pro" pitchFamily="34" charset="-122"/>
+                <a:cs typeface="Be Vietnam Pro" pitchFamily="34" charset="-120"/>
+              </a:rPr>
+              <a:t>FIFO,</a:t>
+            </a:r>
+            <a:r>
+              <a:rPr lang="en-US" sz="2100" dirty="0" spc="-13" kern="0">
+                <a:solidFill>
+                  <a:srgbClr val="E4E1D8"/>
+                </a:solidFill>
+                <a:latin typeface="Be Vietnam Pro" pitchFamily="34" charset="0"/>
+                <a:ea typeface="Be Vietnam Pro" pitchFamily="34" charset="-122"/>
+                <a:cs typeface="Be Vietnam Pro" pitchFamily="34" charset="-120"/>
+              </a:rPr>
+              <a:t> MRU,</a:t>
+            </a:r>
+            <a:r>
+              <a:rPr lang="en-US" sz="2100" dirty="0" spc="-12" kern="0">
+                <a:solidFill>
+                  <a:srgbClr val="E4E1D8"/>
+                </a:solidFill>
+                <a:latin typeface="Be Vietnam Pro" pitchFamily="34" charset="0"/>
+                <a:ea typeface="Be Vietnam Pro" pitchFamily="34" charset="-122"/>
+                <a:cs typeface="Be Vietnam Pro" pitchFamily="34" charset="-120"/>
+              </a:rPr>
+              <a:t> SLRU:</a:t>
+            </a:r>
+            <a:r>
+              <a:rPr lang="en-US" sz="2100" dirty="0" spc="-20" kern="0">
+                <a:solidFill>
+                  <a:srgbClr val="E4E1D8"/>
+                </a:solidFill>
+                <a:latin typeface="Be Vietnam Pro" pitchFamily="34" charset="0"/>
+                <a:ea typeface="Be Vietnam Pro" pitchFamily="34" charset="-122"/>
+                <a:cs typeface="Be Vietnam Pro" pitchFamily="34" charset="-120"/>
+              </a:rPr>
+              <a:t> Redis</a:t>
+            </a:r>
+            <a:r>
+              <a:rPr lang="en-US" sz="2100" dirty="0" spc="0" kern="0">
+                <a:solidFill>
+                  <a:srgbClr val="E4E1D8"/>
+                </a:solidFill>
+                <a:latin typeface="Be Vietnam Pro" pitchFamily="34" charset="0"/>
+                <a:ea typeface="Be Vietnam Pro" pitchFamily="34" charset="-122"/>
+                <a:cs typeface="Be Vietnam Pro" pitchFamily="34" charset="-120"/>
+              </a:rPr>
+              <a:t> không</a:t>
+            </a:r>
+            <a:r>
+              <a:rPr lang="en-US" sz="2100" dirty="0" spc="-4" kern="0">
+                <a:solidFill>
+                  <a:srgbClr val="E4E1D8"/>
+                </a:solidFill>
+                <a:latin typeface="Be Vietnam Pro" pitchFamily="34" charset="0"/>
+                <a:ea typeface="Be Vietnam Pro" pitchFamily="34" charset="-122"/>
+                <a:cs typeface="Be Vietnam Pro" pitchFamily="34" charset="-120"/>
+              </a:rPr>
+              <a:t> có</a:t>
+            </a:r>
+            <a:endParaRPr lang="en-US" sz="2100" dirty="0"/>
           </a:p>
         </p:txBody>
       </p:sp>
       <p:sp>
         <p:nvSpPr>
-          <p:cNvPr id="9" name="Text 7"/>
-          <p:cNvSpPr/>
-          <p:nvPr/>
-        </p:nvSpPr>
-        <p:spPr>
-          <a:xfrm>
-            <a:off x="7429500" y="5715000"/>
-            <a:ext cx="1485900" cy="1219200"/>
-          </a:xfrm>
-          <a:prstGeom prst="rect">
-            <a:avLst/>
-          </a:prstGeom>
-          <a:noFill/>
-          <a:ln/>
-        </p:spPr>
-        <p:txBody>
-          <a:bodyPr wrap="square" lIns="0" tIns="0" rIns="0" bIns="0" rtlCol="0" anchor="ctr"/>
-          <a:lstStyle/>
-          <a:p>
-            <a:pPr algn="r" indent="0" marL="0">
-              <a:buNone/>
-            </a:pPr>
-            <a:r>
-              <a:rPr lang="en-US" sz="1800" b="1" dirty="0" spc="-10" kern="0">
-                <a:solidFill>
-                  <a:srgbClr val="3DD6A0"/>
-                </a:solidFill>
-                <a:latin typeface="Be Vietnam Pro" pitchFamily="34" charset="0"/>
-                <a:ea typeface="Be Vietnam Pro" pitchFamily="34" charset="-122"/>
-                <a:cs typeface="Be Vietnam Pro" pitchFamily="34" charset="-120"/>
-              </a:rPr>
-              <a:t>có</a:t>
-            </a:r>
-            <a:r>
-              <a:rPr lang="en-US" sz="1800" b="1" dirty="0" spc="-11" kern="0">
-                <a:solidFill>
-                  <a:srgbClr val="3DD6A0"/>
-                </a:solidFill>
-                <a:latin typeface="Be Vietnam Pro" pitchFamily="34" charset="0"/>
-                <a:ea typeface="Be Vietnam Pro" pitchFamily="34" charset="-122"/>
-                <a:cs typeface="Be Vietnam Pro" pitchFamily="34" charset="-120"/>
-              </a:rPr>
-              <a:t> trong</a:t>
-            </a:r>
-            <a:r>
-              <a:rPr lang="en-US" sz="1800" b="1" dirty="0" spc="-17" kern="0">
-                <a:solidFill>
-                  <a:srgbClr val="3DD6A0"/>
-                </a:solidFill>
-                <a:latin typeface="Be Vietnam Pro" pitchFamily="34" charset="0"/>
-                <a:ea typeface="Be Vietnam Pro" pitchFamily="34" charset="-122"/>
-                <a:cs typeface="Be Vietnam Pro" pitchFamily="34" charset="-120"/>
-              </a:rPr>
-              <a:t> Redis</a:t>
-            </a:r>
-            <a:endParaRPr lang="en-US" sz="1800" dirty="0"/>
-          </a:p>
-        </p:txBody>
-      </p:sp>
-      <p:sp>
-        <p:nvSpPr>
-          <p:cNvPr id="10" name="Shape 8"/>
-          <p:cNvSpPr/>
-          <p:nvPr/>
-        </p:nvSpPr>
-        <p:spPr>
-          <a:xfrm>
-            <a:off x="9372600" y="5715000"/>
-            <a:ext cx="4000500" cy="1219200"/>
+          <p:cNvPr id="8" name="Shape 6"/>
+          <p:cNvSpPr/>
+          <p:nvPr/>
+        </p:nvSpPr>
+        <p:spPr>
+          <a:xfrm>
+            <a:off x="6515100" y="6286500"/>
+            <a:ext cx="5181600" cy="2095500"/>
           </a:xfrm>
           <a:prstGeom prst="roundRect">
             <a:avLst>
-              <a:gd name="adj" fmla="val 18750"/>
-            </a:avLst>
-          </a:prstGeom>
-          <a:solidFill>
-            <a:srgbClr val="1E212B"/>
-          </a:solidFill>
-          <a:ln w="28575">
-            <a:solidFill>
-              <a:srgbClr val="3DD6A0"/>
-            </a:solidFill>
-            <a:prstDash val="solid"/>
-          </a:ln>
-        </p:spPr>
-      </p:sp>
-      <p:sp>
-        <p:nvSpPr>
-          <p:cNvPr id="11" name="Text 9"/>
-          <p:cNvSpPr/>
-          <p:nvPr/>
-        </p:nvSpPr>
-        <p:spPr>
-          <a:xfrm>
-            <a:off x="9639300" y="5715000"/>
-            <a:ext cx="2286000" cy="1219200"/>
-          </a:xfrm>
-          <a:prstGeom prst="rect">
-            <a:avLst/>
-          </a:prstGeom>
-          <a:noFill/>
-          <a:ln/>
-        </p:spPr>
-        <p:txBody>
-          <a:bodyPr wrap="square" lIns="0" tIns="0" rIns="0" bIns="0" rtlCol="0" anchor="ctr"/>
-          <a:lstStyle/>
-          <a:p>
-            <a:pPr algn="l" indent="0" marL="0">
-              <a:buNone/>
-            </a:pPr>
-            <a:r>
-              <a:rPr lang="en-US" sz="3000" dirty="0" spc="-7" kern="0">
-                <a:solidFill>
-                  <a:srgbClr val="F3EEE3"/>
-                </a:solidFill>
-                <a:latin typeface="Bricolage Grotesque ExtraBold" pitchFamily="34" charset="0"/>
-                <a:ea typeface="Bricolage Grotesque ExtraBold" pitchFamily="34" charset="-122"/>
-                <a:cs typeface="Bricolage Grotesque ExtraBold" pitchFamily="34" charset="-120"/>
-              </a:rPr>
-              <a:t>Ngẫu</a:t>
-            </a:r>
-            <a:r>
-              <a:rPr lang="en-US" sz="3000" dirty="0" spc="-1" kern="0">
-                <a:solidFill>
-                  <a:srgbClr val="F3EEE3"/>
-                </a:solidFill>
-                <a:latin typeface="Bricolage Grotesque ExtraBold" pitchFamily="34" charset="0"/>
-                <a:ea typeface="Bricolage Grotesque ExtraBold" pitchFamily="34" charset="-122"/>
-                <a:cs typeface="Bricolage Grotesque ExtraBold" pitchFamily="34" charset="-120"/>
-              </a:rPr>
-              <a:t> nhiên</a:t>
-            </a:r>
-            <a:endParaRPr lang="en-US" sz="3000" dirty="0"/>
-          </a:p>
-        </p:txBody>
-      </p:sp>
-      <p:sp>
-        <p:nvSpPr>
-          <p:cNvPr id="12" name="Text 10"/>
-          <p:cNvSpPr/>
-          <p:nvPr/>
-        </p:nvSpPr>
-        <p:spPr>
-          <a:xfrm>
-            <a:off x="11658600" y="5715000"/>
-            <a:ext cx="1485900" cy="1219200"/>
-          </a:xfrm>
-          <a:prstGeom prst="rect">
-            <a:avLst/>
-          </a:prstGeom>
-          <a:noFill/>
-          <a:ln/>
-        </p:spPr>
-        <p:txBody>
-          <a:bodyPr wrap="square" lIns="0" tIns="0" rIns="0" bIns="0" rtlCol="0" anchor="ctr"/>
-          <a:lstStyle/>
-          <a:p>
-            <a:pPr algn="r" indent="0" marL="0">
-              <a:buNone/>
-            </a:pPr>
-            <a:r>
-              <a:rPr lang="en-US" sz="1800" b="1" dirty="0" spc="-10" kern="0">
-                <a:solidFill>
-                  <a:srgbClr val="3DD6A0"/>
-                </a:solidFill>
-                <a:latin typeface="Be Vietnam Pro" pitchFamily="34" charset="0"/>
-                <a:ea typeface="Be Vietnam Pro" pitchFamily="34" charset="-122"/>
-                <a:cs typeface="Be Vietnam Pro" pitchFamily="34" charset="-120"/>
-              </a:rPr>
-              <a:t>có</a:t>
-            </a:r>
-            <a:r>
-              <a:rPr lang="en-US" sz="1800" b="1" dirty="0" spc="-11" kern="0">
-                <a:solidFill>
-                  <a:srgbClr val="3DD6A0"/>
-                </a:solidFill>
-                <a:latin typeface="Be Vietnam Pro" pitchFamily="34" charset="0"/>
-                <a:ea typeface="Be Vietnam Pro" pitchFamily="34" charset="-122"/>
-                <a:cs typeface="Be Vietnam Pro" pitchFamily="34" charset="-120"/>
-              </a:rPr>
-              <a:t> trong</a:t>
-            </a:r>
-            <a:r>
-              <a:rPr lang="en-US" sz="1800" b="1" dirty="0" spc="-17" kern="0">
-                <a:solidFill>
-                  <a:srgbClr val="3DD6A0"/>
-                </a:solidFill>
-                <a:latin typeface="Be Vietnam Pro" pitchFamily="34" charset="0"/>
-                <a:ea typeface="Be Vietnam Pro" pitchFamily="34" charset="-122"/>
-                <a:cs typeface="Be Vietnam Pro" pitchFamily="34" charset="-120"/>
-              </a:rPr>
-              <a:t> Redis</a:t>
-            </a:r>
-            <a:endParaRPr lang="en-US" sz="1800" dirty="0"/>
-          </a:p>
-        </p:txBody>
-      </p:sp>
-      <p:sp>
-        <p:nvSpPr>
-          <p:cNvPr id="13" name="Shape 11"/>
-          <p:cNvSpPr/>
-          <p:nvPr/>
-        </p:nvSpPr>
-        <p:spPr>
-          <a:xfrm>
-            <a:off x="13601700" y="5715000"/>
-            <a:ext cx="4000500" cy="1219200"/>
-          </a:xfrm>
-          <a:prstGeom prst="roundRect">
-            <a:avLst>
-              <a:gd name="adj" fmla="val 18750"/>
-            </a:avLst>
-          </a:prstGeom>
-          <a:solidFill>
-            <a:srgbClr val="1E212B"/>
-          </a:solidFill>
-          <a:ln w="28575">
-            <a:solidFill>
-              <a:srgbClr val="3DD6A0"/>
-            </a:solidFill>
-            <a:prstDash val="solid"/>
-          </a:ln>
-        </p:spPr>
-      </p:sp>
-      <p:sp>
-        <p:nvSpPr>
-          <p:cNvPr id="14" name="Text 12"/>
-          <p:cNvSpPr/>
-          <p:nvPr/>
-        </p:nvSpPr>
-        <p:spPr>
-          <a:xfrm>
-            <a:off x="13868400" y="5715000"/>
-            <a:ext cx="2286000" cy="1219200"/>
-          </a:xfrm>
-          <a:prstGeom prst="rect">
-            <a:avLst/>
-          </a:prstGeom>
-          <a:noFill/>
-          <a:ln/>
-        </p:spPr>
-        <p:txBody>
-          <a:bodyPr wrap="square" lIns="0" tIns="0" rIns="0" bIns="0" rtlCol="0" anchor="ctr"/>
-          <a:lstStyle/>
-          <a:p>
-            <a:pPr algn="l" indent="0" marL="0">
-              <a:buNone/>
-            </a:pPr>
-            <a:r>
-              <a:rPr lang="en-US" sz="3300" dirty="0" spc="24" kern="0">
-                <a:solidFill>
-                  <a:srgbClr val="F3EEE3"/>
-                </a:solidFill>
-                <a:latin typeface="Bricolage Grotesque ExtraBold" pitchFamily="34" charset="0"/>
-                <a:ea typeface="Bricolage Grotesque ExtraBold" pitchFamily="34" charset="-122"/>
-                <a:cs typeface="Bricolage Grotesque ExtraBold" pitchFamily="34" charset="-120"/>
-              </a:rPr>
-              <a:t>TTL</a:t>
-            </a:r>
-            <a:endParaRPr lang="en-US" sz="3300" dirty="0"/>
-          </a:p>
-        </p:txBody>
-      </p:sp>
-      <p:sp>
-        <p:nvSpPr>
-          <p:cNvPr id="15" name="Text 13"/>
-          <p:cNvSpPr/>
-          <p:nvPr/>
-        </p:nvSpPr>
-        <p:spPr>
-          <a:xfrm>
-            <a:off x="15887700" y="5715000"/>
-            <a:ext cx="1485900" cy="1219200"/>
-          </a:xfrm>
-          <a:prstGeom prst="rect">
-            <a:avLst/>
-          </a:prstGeom>
-          <a:noFill/>
-          <a:ln/>
-        </p:spPr>
-        <p:txBody>
-          <a:bodyPr wrap="square" lIns="0" tIns="0" rIns="0" bIns="0" rtlCol="0" anchor="ctr"/>
-          <a:lstStyle/>
-          <a:p>
-            <a:pPr algn="r" indent="0" marL="0">
-              <a:buNone/>
-            </a:pPr>
-            <a:r>
-              <a:rPr lang="en-US" sz="1800" b="1" dirty="0" spc="-10" kern="0">
-                <a:solidFill>
-                  <a:srgbClr val="3DD6A0"/>
-                </a:solidFill>
-                <a:latin typeface="Be Vietnam Pro" pitchFamily="34" charset="0"/>
-                <a:ea typeface="Be Vietnam Pro" pitchFamily="34" charset="-122"/>
-                <a:cs typeface="Be Vietnam Pro" pitchFamily="34" charset="-120"/>
-              </a:rPr>
-              <a:t>có</a:t>
-            </a:r>
-            <a:r>
-              <a:rPr lang="en-US" sz="1800" b="1" dirty="0" spc="-11" kern="0">
-                <a:solidFill>
-                  <a:srgbClr val="3DD6A0"/>
-                </a:solidFill>
-                <a:latin typeface="Be Vietnam Pro" pitchFamily="34" charset="0"/>
-                <a:ea typeface="Be Vietnam Pro" pitchFamily="34" charset="-122"/>
-                <a:cs typeface="Be Vietnam Pro" pitchFamily="34" charset="-120"/>
-              </a:rPr>
-              <a:t> trong</a:t>
-            </a:r>
-            <a:r>
-              <a:rPr lang="en-US" sz="1800" b="1" dirty="0" spc="-17" kern="0">
-                <a:solidFill>
-                  <a:srgbClr val="3DD6A0"/>
-                </a:solidFill>
-                <a:latin typeface="Be Vietnam Pro" pitchFamily="34" charset="0"/>
-                <a:ea typeface="Be Vietnam Pro" pitchFamily="34" charset="-122"/>
-                <a:cs typeface="Be Vietnam Pro" pitchFamily="34" charset="-120"/>
-              </a:rPr>
-              <a:t> Redis</a:t>
-            </a:r>
-            <a:endParaRPr lang="en-US" sz="1800" dirty="0"/>
-          </a:p>
-        </p:txBody>
-      </p:sp>
-      <p:sp>
-        <p:nvSpPr>
-          <p:cNvPr id="16" name="Shape 14"/>
-          <p:cNvSpPr/>
-          <p:nvPr/>
-        </p:nvSpPr>
-        <p:spPr>
-          <a:xfrm>
-            <a:off x="914400" y="7143750"/>
-            <a:ext cx="4000500" cy="1219200"/>
-          </a:xfrm>
-          <a:prstGeom prst="roundRect">
-            <a:avLst>
-              <a:gd name="adj" fmla="val 18750"/>
+              <a:gd name="adj" fmla="val 10909"/>
             </a:avLst>
           </a:prstGeom>
           <a:solidFill>
@@ -2414,14 +2196,14 @@
       </p:sp>
       <p:sp>
         <p:nvSpPr>
-          <p:cNvPr id="17" name="Text 15"/>
-          <p:cNvSpPr/>
-          <p:nvPr/>
-        </p:nvSpPr>
-        <p:spPr>
-          <a:xfrm>
-            <a:off x="1181100" y="7143750"/>
-            <a:ext cx="2286000" cy="1219200"/>
+          <p:cNvPr id="9" name="Text 7"/>
+          <p:cNvSpPr/>
+          <p:nvPr/>
+        </p:nvSpPr>
+        <p:spPr>
+          <a:xfrm>
+            <a:off x="6858000" y="6572250"/>
+            <a:ext cx="4572000" cy="666750"/>
           </a:xfrm>
           <a:prstGeom prst="rect">
             <a:avLst/>
@@ -2437,15 +2219,48 @@
               <a:buNone/>
             </a:pPr>
             <a:r>
-              <a:rPr lang="en-US" sz="3300" dirty="0" spc="-21" kern="0">
-                <a:solidFill>
-                  <a:srgbClr val="F3EEE3"/>
+              <a:rPr lang="en-US" sz="3300" dirty="0" spc="0" kern="0">
+                <a:solidFill>
+                  <a:srgbClr val="FF6A4D"/>
                 </a:solidFill>
                 <a:latin typeface="Bricolage Grotesque ExtraBold" pitchFamily="34" charset="0"/>
                 <a:ea typeface="Bricolage Grotesque ExtraBold" pitchFamily="34" charset="-122"/>
                 <a:cs typeface="Bricolage Grotesque ExtraBold" pitchFamily="34" charset="-120"/>
               </a:rPr>
-              <a:t>FIFO</a:t>
+              <a:t>Thử</a:t>
+            </a:r>
+            <a:r>
+              <a:rPr lang="en-US" sz="3300" dirty="0" spc="-8" kern="0">
+                <a:solidFill>
+                  <a:srgbClr val="FF6A4D"/>
+                </a:solidFill>
+                <a:latin typeface="Bricolage Grotesque ExtraBold" pitchFamily="34" charset="0"/>
+                <a:ea typeface="Bricolage Grotesque ExtraBold" pitchFamily="34" charset="-122"/>
+                <a:cs typeface="Bricolage Grotesque ExtraBold" pitchFamily="34" charset="-120"/>
+              </a:rPr>
+              <a:t> trên Redis,</a:t>
+            </a:r>
+            <a:r>
+              <a:rPr lang="en-US" sz="3300" dirty="0" spc="0" kern="0">
+                <a:solidFill>
+                  <a:srgbClr val="FF6A4D"/>
+                </a:solidFill>
+                <a:latin typeface="Bricolage Grotesque ExtraBold" pitchFamily="34" charset="0"/>
+                <a:ea typeface="Bricolage Grotesque ExtraBold" pitchFamily="34" charset="-122"/>
+                <a:cs typeface="Bricolage Grotesque ExtraBold" pitchFamily="34" charset="-120"/>
+              </a:rPr>
+              <a:t> 4</a:t>
+            </a:r>
+            <a:r>
+              <a:rPr lang="en-US" sz="3300" dirty="0" spc="-4" kern="0">
+                <a:solidFill>
+                  <a:srgbClr val="FF6A4D"/>
+                </a:solidFill>
+                <a:latin typeface="Bricolage Grotesque ExtraBold" pitchFamily="34" charset="0"/>
+                <a:ea typeface="Bricolage Grotesque ExtraBold" pitchFamily="34" charset="-122"/>
+                <a:cs typeface="Bricolage Grotesque ExtraBold" pitchFamily="34" charset="-120"/>
+              </a:rPr>
+              <a:t> MB</a:t>
             </a:r>
             <a:endParaRPr lang="en-US" sz="3300" dirty="0"/>
           </a:p>
@@ -2453,14 +2268,14 @@
       </p:sp>
       <p:sp>
         <p:nvSpPr>
-          <p:cNvPr id="18" name="Text 16"/>
-          <p:cNvSpPr/>
-          <p:nvPr/>
-        </p:nvSpPr>
-        <p:spPr>
-          <a:xfrm>
-            <a:off x="3200400" y="7143750"/>
-            <a:ext cx="1485900" cy="1219200"/>
+          <p:cNvPr id="10" name="Text 8"/>
+          <p:cNvSpPr/>
+          <p:nvPr/>
+        </p:nvSpPr>
+        <p:spPr>
+          <a:xfrm>
+            <a:off x="6858000" y="7334250"/>
+            <a:ext cx="4572000" cy="800100"/>
           </a:xfrm>
           <a:prstGeom prst="rect">
             <a:avLst/>
@@ -2469,52 +2284,99 @@
           <a:ln/>
         </p:spPr>
         <p:txBody>
-          <a:bodyPr wrap="square" lIns="0" tIns="0" rIns="0" bIns="0" rtlCol="0" anchor="ctr"/>
+          <a:bodyPr wrap="square" lIns="0" tIns="11335" rIns="0" bIns="-11335" rtlCol="0" anchor="t"/>
           <a:lstStyle/>
           <a:p>
-            <a:pPr algn="r" indent="0" marL="0">
+            <a:pPr algn="l" indent="0" marL="0">
+              <a:lnSpc>
+                <a:spcPts val="2730"/>
+              </a:lnSpc>
               <a:buNone/>
             </a:pPr>
             <a:r>
-              <a:rPr lang="en-US" sz="1800" b="1" dirty="0" spc="-8" kern="0">
-                <a:solidFill>
-                  <a:srgbClr val="FF6A4D"/>
-                </a:solidFill>
-                <a:latin typeface="Be Vietnam Pro" pitchFamily="34" charset="0"/>
-                <a:ea typeface="Be Vietnam Pro" pitchFamily="34" charset="-122"/>
-                <a:cs typeface="Be Vietnam Pro" pitchFamily="34" charset="-120"/>
-              </a:rPr>
-              <a:t>không</a:t>
-            </a:r>
-            <a:r>
-              <a:rPr lang="en-US" sz="1800" b="1" dirty="0" spc="-5" kern="0">
-                <a:solidFill>
-                  <a:srgbClr val="FF6A4D"/>
-                </a:solidFill>
-                <a:latin typeface="Be Vietnam Pro" pitchFamily="34" charset="0"/>
-                <a:ea typeface="Be Vietnam Pro" pitchFamily="34" charset="-122"/>
-                <a:cs typeface="Be Vietnam Pro" pitchFamily="34" charset="-120"/>
-              </a:rPr>
-              <a:t> có</a:t>
-            </a:r>
-            <a:endParaRPr lang="en-US" sz="1800" dirty="0"/>
+              <a:rPr lang="en-US" sz="2100" dirty="0" spc="0" kern="0">
+                <a:solidFill>
+                  <a:srgbClr val="E4E1D8"/>
+                </a:solidFill>
+                <a:latin typeface="Be Vietnam Pro" pitchFamily="34" charset="0"/>
+                <a:ea typeface="Be Vietnam Pro" pitchFamily="34" charset="-122"/>
+                <a:cs typeface="Be Vietnam Pro" pitchFamily="34" charset="-120"/>
+              </a:rPr>
+              <a:t>LFU trúng</a:t>
+            </a:r>
+            <a:r>
+              <a:rPr lang="en-US" sz="2100" dirty="0" spc="1" kern="0">
+                <a:solidFill>
+                  <a:srgbClr val="E4E1D8"/>
+                </a:solidFill>
+                <a:latin typeface="Be Vietnam Pro" pitchFamily="34" charset="0"/>
+                <a:ea typeface="Be Vietnam Pro" pitchFamily="34" charset="-122"/>
+                <a:cs typeface="Be Vietnam Pro" pitchFamily="34" charset="-120"/>
+              </a:rPr>
+              <a:t> nhiều</a:t>
+            </a:r>
+            <a:r>
+              <a:rPr lang="en-US" sz="2100" dirty="0" spc="-10" kern="0">
+                <a:solidFill>
+                  <a:srgbClr val="E4E1D8"/>
+                </a:solidFill>
+                <a:latin typeface="Be Vietnam Pro" pitchFamily="34" charset="0"/>
+                <a:ea typeface="Be Vietnam Pro" pitchFamily="34" charset="-122"/>
+                <a:cs typeface="Be Vietnam Pro" pitchFamily="34" charset="-120"/>
+              </a:rPr>
+              <a:t> nhất</a:t>
+            </a:r>
+            <a:r>
+              <a:rPr lang="en-US" sz="2100" dirty="0" spc="-2" kern="0">
+                <a:solidFill>
+                  <a:srgbClr val="E4E1D8"/>
+                </a:solidFill>
+                <a:latin typeface="Be Vietnam Pro" pitchFamily="34" charset="0"/>
+                <a:ea typeface="Be Vietnam Pro" pitchFamily="34" charset="-122"/>
+                <a:cs typeface="Be Vietnam Pro" pitchFamily="34" charset="-120"/>
+              </a:rPr>
+              <a:t> cả</a:t>
+            </a:r>
+            <a:r>
+              <a:rPr lang="en-US" sz="2100" dirty="0" spc="-8" kern="0">
+                <a:solidFill>
+                  <a:srgbClr val="E4E1D8"/>
+                </a:solidFill>
+                <a:latin typeface="Be Vietnam Pro" pitchFamily="34" charset="0"/>
+                <a:ea typeface="Be Vietnam Pro" pitchFamily="34" charset="-122"/>
+                <a:cs typeface="Be Vietnam Pro" pitchFamily="34" charset="-120"/>
+              </a:rPr>
+              <a:t> ba</a:t>
+            </a:r>
+            <a:r>
+              <a:rPr lang="en-US" sz="2100" dirty="0" spc="2" kern="0">
+                <a:solidFill>
+                  <a:srgbClr val="E4E1D8"/>
+                </a:solidFill>
+                <a:latin typeface="Be Vietnam Pro" pitchFamily="34" charset="0"/>
+                <a:ea typeface="Be Vietnam Pro" pitchFamily="34" charset="-122"/>
+                <a:cs typeface="Be Vietnam Pro" pitchFamily="34" charset="-120"/>
+              </a:rPr>
+              <a:t> kiểu</a:t>
+            </a:r>
+            <a:endParaRPr lang="en-US" sz="2100" dirty="0"/>
           </a:p>
         </p:txBody>
       </p:sp>
       <p:sp>
         <p:nvSpPr>
-          <p:cNvPr id="19" name="Shape 17"/>
-          <p:cNvSpPr/>
-          <p:nvPr/>
-        </p:nvSpPr>
-        <p:spPr>
-          <a:xfrm>
-            <a:off x="5143500" y="7143750"/>
-            <a:ext cx="4000500" cy="1219200"/>
+          <p:cNvPr id="11" name="Shape 9"/>
+          <p:cNvSpPr/>
+          <p:nvPr/>
+        </p:nvSpPr>
+        <p:spPr>
+          <a:xfrm>
+            <a:off x="12115800" y="6286500"/>
+            <a:ext cx="5257800" cy="2095500"/>
           </a:xfrm>
           <a:prstGeom prst="roundRect">
             <a:avLst>
-              <a:gd name="adj" fmla="val 18750"/>
+              <a:gd name="adj" fmla="val 10909"/>
             </a:avLst>
           </a:prstGeom>
           <a:solidFill>
@@ -2522,7 +2384,7 @@
           </a:solidFill>
           <a:ln w="28575">
             <a:solidFill>
-              <a:srgbClr val="FF6A4D"/>
+              <a:srgbClr val="7C93FF"/>
             </a:solidFill>
             <a:prstDash val="solid"/>
           </a:ln>
@@ -2530,14 +2392,14 @@
       </p:sp>
       <p:sp>
         <p:nvSpPr>
-          <p:cNvPr id="20" name="Text 18"/>
-          <p:cNvSpPr/>
-          <p:nvPr/>
-        </p:nvSpPr>
-        <p:spPr>
-          <a:xfrm>
-            <a:off x="5410200" y="7143750"/>
-            <a:ext cx="2286000" cy="1219200"/>
+          <p:cNvPr id="12" name="Text 10"/>
+          <p:cNvSpPr/>
+          <p:nvPr/>
+        </p:nvSpPr>
+        <p:spPr>
+          <a:xfrm>
+            <a:off x="12458700" y="6572250"/>
+            <a:ext cx="4572000" cy="666750"/>
           </a:xfrm>
           <a:prstGeom prst="rect">
             <a:avLst/>
@@ -2553,15 +2415,26 @@
               <a:buNone/>
             </a:pPr>
             <a:r>
-              <a:rPr lang="en-US" sz="3300" dirty="0" spc="-14" kern="0">
-                <a:solidFill>
-                  <a:srgbClr val="F3EEE3"/>
+              <a:rPr lang="en-US" sz="3300" dirty="0" spc="1" kern="0">
+                <a:solidFill>
+                  <a:srgbClr val="7C93FF"/>
                 </a:solidFill>
                 <a:latin typeface="Bricolage Grotesque ExtraBold" pitchFamily="34" charset="0"/>
                 <a:ea typeface="Bricolage Grotesque ExtraBold" pitchFamily="34" charset="-122"/>
                 <a:cs typeface="Bricolage Grotesque ExtraBold" pitchFamily="34" charset="-120"/>
               </a:rPr>
-              <a:t>MRU</a:t>
+              <a:t>Bẫy cấu</a:t>
+            </a:r>
+            <a:r>
+              <a:rPr lang="en-US" sz="3300" dirty="0" spc="-7" kern="0">
+                <a:solidFill>
+                  <a:srgbClr val="7C93FF"/>
+                </a:solidFill>
+                <a:latin typeface="Bricolage Grotesque ExtraBold" pitchFamily="34" charset="0"/>
+                <a:ea typeface="Bricolage Grotesque ExtraBold" pitchFamily="34" charset="-122"/>
+                <a:cs typeface="Bricolage Grotesque ExtraBold" pitchFamily="34" charset="-120"/>
+              </a:rPr>
+              <a:t> hình</a:t>
             </a:r>
             <a:endParaRPr lang="en-US" sz="3300" dirty="0"/>
           </a:p>
@@ -2569,14 +2442,14 @@
       </p:sp>
       <p:sp>
         <p:nvSpPr>
-          <p:cNvPr id="21" name="Text 19"/>
-          <p:cNvSpPr/>
-          <p:nvPr/>
-        </p:nvSpPr>
-        <p:spPr>
-          <a:xfrm>
-            <a:off x="7429500" y="7143750"/>
-            <a:ext cx="1485900" cy="1219200"/>
+          <p:cNvPr id="13" name="Text 11"/>
+          <p:cNvSpPr/>
+          <p:nvPr/>
+        </p:nvSpPr>
+        <p:spPr>
+          <a:xfrm>
+            <a:off x="12458700" y="7334250"/>
+            <a:ext cx="4572000" cy="800100"/>
           </a:xfrm>
           <a:prstGeom prst="rect">
             <a:avLst/>
@@ -2585,284 +2458,77 @@
           <a:ln/>
         </p:spPr>
         <p:txBody>
-          <a:bodyPr wrap="square" lIns="0" tIns="0" rIns="0" bIns="0" rtlCol="0" anchor="ctr"/>
-          <a:lstStyle/>
-          <a:p>
-            <a:pPr algn="r" indent="0" marL="0">
-              <a:buNone/>
-            </a:pPr>
-            <a:r>
-              <a:rPr lang="en-US" sz="1800" b="1" dirty="0" spc="-8" kern="0">
-                <a:solidFill>
-                  <a:srgbClr val="FF6A4D"/>
-                </a:solidFill>
-                <a:latin typeface="Be Vietnam Pro" pitchFamily="34" charset="0"/>
-                <a:ea typeface="Be Vietnam Pro" pitchFamily="34" charset="-122"/>
-                <a:cs typeface="Be Vietnam Pro" pitchFamily="34" charset="-120"/>
-              </a:rPr>
-              <a:t>không</a:t>
-            </a:r>
-            <a:r>
-              <a:rPr lang="en-US" sz="1800" b="1" dirty="0" spc="-5" kern="0">
-                <a:solidFill>
-                  <a:srgbClr val="FF6A4D"/>
-                </a:solidFill>
-                <a:latin typeface="Be Vietnam Pro" pitchFamily="34" charset="0"/>
-                <a:ea typeface="Be Vietnam Pro" pitchFamily="34" charset="-122"/>
-                <a:cs typeface="Be Vietnam Pro" pitchFamily="34" charset="-120"/>
-              </a:rPr>
-              <a:t> có</a:t>
-            </a:r>
-            <a:endParaRPr lang="en-US" sz="1800" dirty="0"/>
-          </a:p>
-        </p:txBody>
-      </p:sp>
-      <p:sp>
-        <p:nvSpPr>
-          <p:cNvPr id="22" name="Shape 20"/>
-          <p:cNvSpPr/>
-          <p:nvPr/>
-        </p:nvSpPr>
-        <p:spPr>
-          <a:xfrm>
-            <a:off x="9372600" y="7143750"/>
-            <a:ext cx="4000500" cy="1219200"/>
-          </a:xfrm>
-          <a:prstGeom prst="roundRect">
-            <a:avLst>
-              <a:gd name="adj" fmla="val 18750"/>
-            </a:avLst>
-          </a:prstGeom>
-          <a:solidFill>
-            <a:srgbClr val="1E212B"/>
-          </a:solidFill>
-          <a:ln w="28575">
-            <a:solidFill>
-              <a:srgbClr val="FF6A4D"/>
-            </a:solidFill>
-            <a:prstDash val="solid"/>
-          </a:ln>
-        </p:spPr>
-      </p:sp>
-      <p:sp>
-        <p:nvSpPr>
-          <p:cNvPr id="23" name="Text 21"/>
-          <p:cNvSpPr/>
-          <p:nvPr/>
-        </p:nvSpPr>
-        <p:spPr>
-          <a:xfrm>
-            <a:off x="9639300" y="7143750"/>
-            <a:ext cx="2286000" cy="1219200"/>
-          </a:xfrm>
-          <a:prstGeom prst="rect">
-            <a:avLst/>
-          </a:prstGeom>
-          <a:noFill/>
-          <a:ln/>
-        </p:spPr>
-        <p:txBody>
-          <a:bodyPr wrap="square" lIns="0" tIns="0" rIns="0" bIns="0" rtlCol="0" anchor="ctr"/>
+          <a:bodyPr wrap="square" lIns="0" tIns="11335" rIns="0" bIns="-11335" rtlCol="0" anchor="t"/>
           <a:lstStyle/>
           <a:p>
             <a:pPr algn="l" indent="0" marL="0">
+              <a:lnSpc>
+                <a:spcPts val="2730"/>
+              </a:lnSpc>
               <a:buNone/>
             </a:pPr>
             <a:r>
-              <a:rPr lang="en-US" sz="3300" dirty="0" spc="-7" kern="0">
-                <a:solidFill>
-                  <a:srgbClr val="F3EEE3"/>
-                </a:solidFill>
-                <a:latin typeface="Bricolage Grotesque ExtraBold" pitchFamily="34" charset="0"/>
-                <a:ea typeface="Bricolage Grotesque ExtraBold" pitchFamily="34" charset="-122"/>
-                <a:cs typeface="Bricolage Grotesque ExtraBold" pitchFamily="34" charset="-120"/>
-              </a:rPr>
-              <a:t>SLRU</a:t>
-            </a:r>
-            <a:endParaRPr lang="en-US" sz="3300" dirty="0"/>
+              <a:rPr lang="en-US" sz="2100" dirty="0" spc="-4" kern="0">
+                <a:solidFill>
+                  <a:srgbClr val="E4E1D8"/>
+                </a:solidFill>
+                <a:latin typeface="Be Vietnam Pro" pitchFamily="34" charset="0"/>
+                <a:ea typeface="Be Vietnam Pro" pitchFamily="34" charset="-122"/>
+                <a:cs typeface="Be Vietnam Pro" pitchFamily="34" charset="-120"/>
+              </a:rPr>
+              <a:t>noeviction:</a:t>
+            </a:r>
+            <a:r>
+              <a:rPr lang="en-US" sz="2100" dirty="0" spc="0" kern="0">
+                <a:solidFill>
+                  <a:srgbClr val="E4E1D8"/>
+                </a:solidFill>
+                <a:latin typeface="Be Vietnam Pro" pitchFamily="34" charset="0"/>
+                <a:ea typeface="Be Vietnam Pro" pitchFamily="34" charset="-122"/>
+                <a:cs typeface="Be Vietnam Pro" pitchFamily="34" charset="-120"/>
+              </a:rPr>
+              <a:t> đầy</a:t>
+            </a:r>
+            <a:r>
+              <a:rPr lang="en-US" sz="2100" dirty="0" spc="-4" kern="0">
+                <a:solidFill>
+                  <a:srgbClr val="E4E1D8"/>
+                </a:solidFill>
+                <a:latin typeface="Be Vietnam Pro" pitchFamily="34" charset="0"/>
+                <a:ea typeface="Be Vietnam Pro" pitchFamily="34" charset="-122"/>
+                <a:cs typeface="Be Vietnam Pro" pitchFamily="34" charset="-120"/>
+              </a:rPr>
+              <a:t> là</a:t>
+            </a:r>
+            <a:r>
+              <a:rPr lang="en-US" sz="2100" dirty="0" spc="0" kern="0">
+                <a:solidFill>
+                  <a:srgbClr val="E4E1D8"/>
+                </a:solidFill>
+                <a:latin typeface="Be Vietnam Pro" pitchFamily="34" charset="0"/>
+                <a:ea typeface="Be Vietnam Pro" pitchFamily="34" charset="-122"/>
+                <a:cs typeface="Be Vietnam Pro" pitchFamily="34" charset="-120"/>
+              </a:rPr>
+              <a:t> lệnh ghi</a:t>
+            </a:r>
+            <a:r>
+              <a:rPr lang="en-US" sz="2100" dirty="0" spc="-2" kern="0">
+                <a:solidFill>
+                  <a:srgbClr val="E4E1D8"/>
+                </a:solidFill>
+                <a:latin typeface="Be Vietnam Pro" pitchFamily="34" charset="0"/>
+                <a:ea typeface="Be Vietnam Pro" pitchFamily="34" charset="-122"/>
+                <a:cs typeface="Be Vietnam Pro" pitchFamily="34" charset="-120"/>
+              </a:rPr>
+              <a:t> lỗi</a:t>
+            </a:r>
+            <a:endParaRPr lang="en-US" sz="2100" dirty="0"/>
           </a:p>
         </p:txBody>
       </p:sp>
       <p:sp>
         <p:nvSpPr>
-          <p:cNvPr id="24" name="Text 22"/>
-          <p:cNvSpPr/>
-          <p:nvPr/>
-        </p:nvSpPr>
-        <p:spPr>
-          <a:xfrm>
-            <a:off x="11658600" y="7143750"/>
-            <a:ext cx="1485900" cy="1219200"/>
-          </a:xfrm>
-          <a:prstGeom prst="rect">
-            <a:avLst/>
-          </a:prstGeom>
-          <a:noFill/>
-          <a:ln/>
-        </p:spPr>
-        <p:txBody>
-          <a:bodyPr wrap="square" lIns="0" tIns="0" rIns="0" bIns="0" rtlCol="0" anchor="ctr"/>
-          <a:lstStyle/>
-          <a:p>
-            <a:pPr algn="r" indent="0" marL="0">
-              <a:buNone/>
-            </a:pPr>
-            <a:r>
-              <a:rPr lang="en-US" sz="1800" b="1" dirty="0" spc="-8" kern="0">
-                <a:solidFill>
-                  <a:srgbClr val="FF6A4D"/>
-                </a:solidFill>
-                <a:latin typeface="Be Vietnam Pro" pitchFamily="34" charset="0"/>
-                <a:ea typeface="Be Vietnam Pro" pitchFamily="34" charset="-122"/>
-                <a:cs typeface="Be Vietnam Pro" pitchFamily="34" charset="-120"/>
-              </a:rPr>
-              <a:t>không</a:t>
-            </a:r>
-            <a:r>
-              <a:rPr lang="en-US" sz="1800" b="1" dirty="0" spc="-5" kern="0">
-                <a:solidFill>
-                  <a:srgbClr val="FF6A4D"/>
-                </a:solidFill>
-                <a:latin typeface="Be Vietnam Pro" pitchFamily="34" charset="0"/>
-                <a:ea typeface="Be Vietnam Pro" pitchFamily="34" charset="-122"/>
-                <a:cs typeface="Be Vietnam Pro" pitchFamily="34" charset="-120"/>
-              </a:rPr>
-              <a:t> có</a:t>
-            </a:r>
-            <a:endParaRPr lang="en-US" sz="1800" dirty="0"/>
-          </a:p>
-        </p:txBody>
-      </p:sp>
-      <p:sp>
-        <p:nvSpPr>
-          <p:cNvPr id="25" name="Shape 23"/>
-          <p:cNvSpPr/>
-          <p:nvPr/>
-        </p:nvSpPr>
-        <p:spPr>
-          <a:xfrm>
-            <a:off x="13601700" y="7143750"/>
-            <a:ext cx="4000500" cy="1219200"/>
-          </a:xfrm>
-          <a:prstGeom prst="roundRect">
-            <a:avLst>
-              <a:gd name="adj" fmla="val 18750"/>
-            </a:avLst>
-          </a:prstGeom>
-          <a:solidFill>
-            <a:srgbClr val="1E212B"/>
-          </a:solidFill>
-          <a:ln w="28575">
-            <a:solidFill>
-              <a:srgbClr val="9AA0B5"/>
-            </a:solidFill>
-            <a:prstDash val="solid"/>
-          </a:ln>
-        </p:spPr>
-      </p:sp>
-      <p:sp>
-        <p:nvSpPr>
-          <p:cNvPr id="26" name="Text 24"/>
-          <p:cNvSpPr/>
-          <p:nvPr/>
-        </p:nvSpPr>
-        <p:spPr>
-          <a:xfrm>
-            <a:off x="13868400" y="7143750"/>
-            <a:ext cx="2286000" cy="1219200"/>
-          </a:xfrm>
-          <a:prstGeom prst="rect">
-            <a:avLst/>
-          </a:prstGeom>
-          <a:noFill/>
-          <a:ln/>
-        </p:spPr>
-        <p:txBody>
-          <a:bodyPr wrap="square" lIns="0" tIns="0" rIns="0" bIns="0" rtlCol="0" anchor="ctr"/>
-          <a:lstStyle/>
-          <a:p>
-            <a:pPr algn="l" indent="0" marL="0">
-              <a:buNone/>
-            </a:pPr>
-            <a:r>
-              <a:rPr lang="en-US" sz="3300" dirty="0" spc="1" kern="0">
-                <a:solidFill>
-                  <a:srgbClr val="F3EEE3"/>
-                </a:solidFill>
-                <a:latin typeface="Bricolage Grotesque ExtraBold" pitchFamily="34" charset="0"/>
-                <a:ea typeface="Bricolage Grotesque ExtraBold" pitchFamily="34" charset="-122"/>
-                <a:cs typeface="Bricolage Grotesque ExtraBold" pitchFamily="34" charset="-120"/>
-              </a:rPr>
-              <a:t>Hai</a:t>
-            </a:r>
-            <a:r>
-              <a:rPr lang="en-US" sz="3300" dirty="0" spc="-1" kern="0">
-                <a:solidFill>
-                  <a:srgbClr val="F3EEE3"/>
-                </a:solidFill>
-                <a:latin typeface="Bricolage Grotesque ExtraBold" pitchFamily="34" charset="0"/>
-                <a:ea typeface="Bricolage Grotesque ExtraBold" pitchFamily="34" charset="-122"/>
-                <a:cs typeface="Bricolage Grotesque ExtraBold" pitchFamily="34" charset="-120"/>
-              </a:rPr>
-              <a:t> tầng</a:t>
-            </a:r>
-            <a:endParaRPr lang="en-US" sz="3300" dirty="0"/>
-          </a:p>
-        </p:txBody>
-      </p:sp>
-      <p:sp>
-        <p:nvSpPr>
-          <p:cNvPr id="27" name="Text 25"/>
-          <p:cNvSpPr/>
-          <p:nvPr/>
-        </p:nvSpPr>
-        <p:spPr>
-          <a:xfrm>
-            <a:off x="15887700" y="7143750"/>
-            <a:ext cx="1485900" cy="1219200"/>
-          </a:xfrm>
-          <a:prstGeom prst="rect">
-            <a:avLst/>
-          </a:prstGeom>
-          <a:noFill/>
-          <a:ln/>
-        </p:spPr>
-        <p:txBody>
-          <a:bodyPr wrap="square" lIns="0" tIns="0" rIns="0" bIns="0" rtlCol="0" anchor="ctr"/>
-          <a:lstStyle/>
-          <a:p>
-            <a:pPr algn="r" indent="0" marL="0">
-              <a:buNone/>
-            </a:pPr>
-            <a:r>
-              <a:rPr lang="en-US" sz="1800" b="1" dirty="0" spc="-2" kern="0">
-                <a:solidFill>
-                  <a:srgbClr val="9AA0B5"/>
-                </a:solidFill>
-                <a:latin typeface="Be Vietnam Pro" pitchFamily="34" charset="0"/>
-                <a:ea typeface="Be Vietnam Pro" pitchFamily="34" charset="-122"/>
-                <a:cs typeface="Be Vietnam Pro" pitchFamily="34" charset="-120"/>
-              </a:rPr>
-              <a:t>tự</a:t>
-            </a:r>
-            <a:r>
-              <a:rPr lang="en-US" sz="1800" b="1" dirty="0" spc="2" kern="0">
-                <a:solidFill>
-                  <a:srgbClr val="9AA0B5"/>
-                </a:solidFill>
-                <a:latin typeface="Be Vietnam Pro" pitchFamily="34" charset="0"/>
-                <a:ea typeface="Be Vietnam Pro" pitchFamily="34" charset="-122"/>
-                <a:cs typeface="Be Vietnam Pro" pitchFamily="34" charset="-120"/>
-              </a:rPr>
-              <a:t> làm</a:t>
-            </a:r>
-            <a:endParaRPr lang="en-US" sz="1800" dirty="0"/>
-          </a:p>
-        </p:txBody>
-      </p:sp>
-      <p:sp>
-        <p:nvSpPr>
-          <p:cNvPr id="28" name="Text 26"/>
+          <p:cNvPr id="14" name="Text 12"/>
           <p:cNvSpPr/>
           <p:nvPr/>
         </p:nvSpPr>
@@ -3000,7 +2666,7 @@
       </p:sp>
       <p:sp>
         <p:nvSpPr>
-          <p:cNvPr id="29" name="Shape 27"/>
+          <p:cNvPr id="15" name="Shape 13"/>
           <p:cNvSpPr/>
           <p:nvPr/>
         </p:nvSpPr>
@@ -3024,7 +2690,7 @@
       </p:sp>
       <p:pic>
         <p:nvPicPr>
-          <p:cNvPr id="30" name="Moda image moda-export-watermark-3df41474-e28c-4aff-a7a4-00d114b72d43" descr="">    </p:cNvPr>
+          <p:cNvPr id="16" name="Moda image moda-export-watermark-3df41474-e28c-4aff-a7a4-00d114b72d43" descr="">    </p:cNvPr>
           <p:cNvPicPr>
             <a:picLocks noChangeAspect="1"/>
           </p:cNvPicPr>
@@ -3302,7 +2968,7 @@
               <a:t> mềm</a:t>
             </a:r>
             <a:r>
-              <a:rPr lang="en-US" sz="6900" dirty="0" spc="-14" kern="0">
+              <a:rPr lang="en-US" sz="6900" dirty="0" spc="0" kern="0">
                 <a:solidFill>
                   <a:srgbClr val="14161C"/>
                 </a:solidFill>
@@ -3310,10 +2976,10 @@
                 <a:ea typeface="Bricolage Grotesque ExtraBold" pitchFamily="34" charset="-122"/>
                 <a:cs typeface="Bricolage Grotesque ExtraBold" pitchFamily="34" charset="-120"/>
               </a:rPr>
-              <a:t> mình</a:t>
-            </a:r>
-            <a:r>
-              <a:rPr lang="en-US" sz="6900" dirty="0" spc="2" kern="0">
+              <a:t> cho chọn</a:t>
+            </a:r>
+            <a:r>
+              <a:rPr lang="en-US" sz="6900" dirty="0" spc="-25" kern="0">
                 <a:solidFill>
                   <a:srgbClr val="14161C"/>
                 </a:solidFill>
@@ -3321,10 +2987,10 @@
                 <a:ea typeface="Bricolage Grotesque ExtraBold" pitchFamily="34" charset="-122"/>
                 <a:cs typeface="Bricolage Grotesque ExtraBold" pitchFamily="34" charset="-120"/>
               </a:rPr>
-              <a:t> dùng</a:t>
-            </a:r>
-            <a:r>
-              <a:rPr lang="en-US" sz="6900" dirty="0" spc="-1" kern="0">
+              <a:t> gì,</a:t>
+            </a:r>
+            <a:r>
+              <a:rPr lang="en-US" sz="6900" dirty="0" spc="0" kern="0">
                 <a:solidFill>
                   <a:srgbClr val="14161C"/>
                 </a:solidFill>
@@ -3332,10 +2998,10 @@
                 <a:ea typeface="Bricolage Grotesque ExtraBold" pitchFamily="34" charset="-122"/>
                 <a:cs typeface="Bricolage Grotesque ExtraBold" pitchFamily="34" charset="-120"/>
               </a:rPr>
-              <a:t> cho</a:t>
-            </a:r>
-            <a:r>
-              <a:rPr lang="en-US" sz="6900" dirty="0" spc="0" kern="0">
+              <a:t> chọn</a:t>
+            </a:r>
+            <a:r>
+              <a:rPr lang="en-US" sz="6900" dirty="0" spc="1" kern="0">
                 <a:solidFill>
                   <a:srgbClr val="14161C"/>
                 </a:solidFill>
@@ -3343,10 +3009,10 @@
                 <a:ea typeface="Bricolage Grotesque ExtraBold" pitchFamily="34" charset="-122"/>
                 <a:cs typeface="Bricolage Grotesque ExtraBold" pitchFamily="34" charset="-120"/>
               </a:rPr>
-              <a:t> chọn</a:t>
-            </a:r>
-            <a:r>
-              <a:rPr lang="en-US" sz="6900" dirty="0" spc="-25" kern="0">
+              <a:t> sai</a:t>
+            </a:r>
+            <a:r>
+              <a:rPr lang="en-US" sz="6900" dirty="0" spc="-18" kern="0">
                 <a:solidFill>
                   <a:srgbClr val="14161C"/>
                 </a:solidFill>
@@ -3354,54 +3020,10 @@
                 <a:ea typeface="Bricolage Grotesque ExtraBold" pitchFamily="34" charset="-122"/>
                 <a:cs typeface="Bricolage Grotesque ExtraBold" pitchFamily="34" charset="-120"/>
               </a:rPr>
-              <a:t> gì,</a:t>
-            </a:r>
-            <a:r>
-              <a:rPr lang="en-US" sz="6900" dirty="0" spc="-76" kern="0">
-                <a:solidFill>
-                  <a:srgbClr val="14161C"/>
-                </a:solidFill>
-                <a:latin typeface="Bricolage Grotesque ExtraBold" pitchFamily="34" charset="0"/>
-                <a:ea typeface="Bricolage Grotesque ExtraBold" pitchFamily="34" charset="-122"/>
-                <a:cs typeface="Bricolage Grotesque ExtraBold" pitchFamily="34" charset="-120"/>
-              </a:rPr>
-              <a:t> và</a:t>
-            </a:r>
-            <a:r>
-              <a:rPr lang="en-US" sz="6900" dirty="0" spc="0" kern="0">
-                <a:solidFill>
-                  <a:srgbClr val="14161C"/>
-                </a:solidFill>
-                <a:latin typeface="Bricolage Grotesque ExtraBold" pitchFamily="34" charset="0"/>
-                <a:ea typeface="Bricolage Grotesque ExtraBold" pitchFamily="34" charset="-122"/>
-                <a:cs typeface="Bricolage Grotesque ExtraBold" pitchFamily="34" charset="-120"/>
-              </a:rPr>
-              <a:t> chọn</a:t>
-            </a:r>
-            <a:r>
-              <a:rPr lang="en-US" sz="6900" dirty="0" spc="1" kern="0">
-                <a:solidFill>
-                  <a:srgbClr val="14161C"/>
-                </a:solidFill>
-                <a:latin typeface="Bricolage Grotesque ExtraBold" pitchFamily="34" charset="0"/>
-                <a:ea typeface="Bricolage Grotesque ExtraBold" pitchFamily="34" charset="-122"/>
-                <a:cs typeface="Bricolage Grotesque ExtraBold" pitchFamily="34" charset="-120"/>
-              </a:rPr>
-              <a:t> sai</a:t>
-            </a:r>
-            <a:r>
-              <a:rPr lang="en-US" sz="6900" dirty="0" spc="-17" kern="0">
-                <a:solidFill>
-                  <a:srgbClr val="14161C"/>
-                </a:solidFill>
-                <a:latin typeface="Bricolage Grotesque ExtraBold" pitchFamily="34" charset="0"/>
-                <a:ea typeface="Bricolage Grotesque ExtraBold" pitchFamily="34" charset="-122"/>
-                <a:cs typeface="Bricolage Grotesque ExtraBold" pitchFamily="34" charset="-120"/>
-              </a:rPr>
               <a:t> thì</a:t>
             </a:r>
             <a:r>
-              <a:rPr lang="en-US" sz="6900" dirty="0" spc="-41" kern="0">
+              <a:rPr lang="en-US" sz="6900" dirty="0" spc="-40" kern="0">
                 <a:solidFill>
                   <a:srgbClr val="14161C"/>
                 </a:solidFill>
@@ -3462,7 +3084,7 @@
                 <a:ea typeface="Be Vietnam Pro" pitchFamily="34" charset="-122"/>
                 <a:cs typeface="Be Vietnam Pro" pitchFamily="34" charset="-120"/>
               </a:rPr>
-              <a:t> tám</a:t>
+              <a:t> tám tên</a:t>
             </a:r>
             <a:r>
               <a:rPr lang="en-US" sz="2550" dirty="0" spc="0" kern="0">
@@ -3473,10 +3095,10 @@
                 <a:ea typeface="Be Vietnam Pro" pitchFamily="34" charset="-122"/>
                 <a:cs typeface="Be Vietnam Pro" pitchFamily="34" charset="-120"/>
               </a:rPr>
-              <a:t> cái</a:t>
-            </a:r>
-            <a:r>
-              <a:rPr lang="en-US" sz="2550" dirty="0" spc="-11" kern="0">
+              <a:t> cạnh</a:t>
+            </a:r>
+            <a:r>
+              <a:rPr lang="en-US" sz="2550" dirty="0" spc="-1" kern="0">
                 <a:solidFill>
                   <a:srgbClr val="6B6A66"/>
                 </a:solidFill>
@@ -3484,7 +3106,29 @@
                 <a:ea typeface="Be Vietnam Pro" pitchFamily="34" charset="-122"/>
                 <a:cs typeface="Be Vietnam Pro" pitchFamily="34" charset="-120"/>
               </a:rPr>
-              <a:t> tên</a:t>
+              <a:t> tùy chọn</a:t>
+            </a:r>
+            <a:r>
+              <a:rPr lang="en-US" sz="2550" dirty="0" spc="-20" kern="0">
+                <a:solidFill>
+                  <a:srgbClr val="6B6A66"/>
+                </a:solidFill>
+                <a:latin typeface="Be Vietnam Pro" pitchFamily="34" charset="0"/>
+                <a:ea typeface="Be Vietnam Pro" pitchFamily="34" charset="-122"/>
+                <a:cs typeface="Be Vietnam Pro" pitchFamily="34" charset="-120"/>
+              </a:rPr>
+              <a:t> Redis,</a:t>
+            </a:r>
+            <a:r>
+              <a:rPr lang="en-US" sz="2550" dirty="0" spc="-27" kern="0">
+                <a:solidFill>
+                  <a:srgbClr val="6B6A66"/>
+                </a:solidFill>
+                <a:latin typeface="Be Vietnam Pro" pitchFamily="34" charset="0"/>
+                <a:ea typeface="Be Vietnam Pro" pitchFamily="34" charset="-122"/>
+                <a:cs typeface="Be Vietnam Pro" pitchFamily="34" charset="-120"/>
+              </a:rPr>
+              <a:t> rồi</a:t>
             </a:r>
             <a:r>
               <a:rPr lang="en-US" sz="2550" dirty="0" spc="0" kern="0">
@@ -3495,84 +3139,7 @@
                 <a:ea typeface="Be Vietnam Pro" pitchFamily="34" charset="-122"/>
                 <a:cs typeface="Be Vietnam Pro" pitchFamily="34" charset="-120"/>
               </a:rPr>
-              <a:t> cạnh</a:t>
-            </a:r>
-            <a:r>
-              <a:rPr lang="en-US" sz="2550" dirty="0" spc="-1" kern="0">
-                <a:solidFill>
-                  <a:srgbClr val="6B6A66"/>
-                </a:solidFill>
-                <a:latin typeface="Be Vietnam Pro" pitchFamily="34" charset="0"/>
-                <a:ea typeface="Be Vietnam Pro" pitchFamily="34" charset="-122"/>
-                <a:cs typeface="Be Vietnam Pro" pitchFamily="34" charset="-120"/>
-              </a:rPr>
-              <a:t> tùy chọn của</a:t>
-            </a:r>
-            <a:r>
-              <a:rPr lang="en-US" sz="2550" dirty="0" spc="-24" kern="0">
-                <a:solidFill>
-                  <a:srgbClr val="6B6A66"/>
-                </a:solidFill>
-                <a:latin typeface="Be Vietnam Pro" pitchFamily="34" charset="0"/>
-                <a:ea typeface="Be Vietnam Pro" pitchFamily="34" charset="-122"/>
-                <a:cs typeface="Be Vietnam Pro" pitchFamily="34" charset="-120"/>
-              </a:rPr>
-              <a:t> Redis</a:t>
-            </a:r>
-            <a:r>
-              <a:rPr lang="en-US" sz="2550" dirty="0" spc="0" kern="0">
-                <a:solidFill>
-                  <a:srgbClr val="6B6A66"/>
-                </a:solidFill>
-                <a:latin typeface="Be Vietnam Pro" pitchFamily="34" charset="0"/>
-                <a:ea typeface="Be Vietnam Pro" pitchFamily="34" charset="-122"/>
-                <a:cs typeface="Be Vietnam Pro" pitchFamily="34" charset="-120"/>
-              </a:rPr>
-              <a:t> 7.0.15,</a:t>
-            </a:r>
-            <a:r>
-              <a:rPr lang="en-US" sz="2550" dirty="0" spc="-27" kern="0">
-                <a:solidFill>
-                  <a:srgbClr val="6B6A66"/>
-                </a:solidFill>
-                <a:latin typeface="Be Vietnam Pro" pitchFamily="34" charset="0"/>
-                <a:ea typeface="Be Vietnam Pro" pitchFamily="34" charset="-122"/>
-                <a:cs typeface="Be Vietnam Pro" pitchFamily="34" charset="-120"/>
-              </a:rPr>
-              <a:t> rồi</a:t>
-            </a:r>
-            <a:r>
-              <a:rPr lang="en-US" sz="2550" dirty="0" spc="-1" kern="0">
-                <a:solidFill>
-                  <a:srgbClr val="6B6A66"/>
-                </a:solidFill>
-                <a:latin typeface="Be Vietnam Pro" pitchFamily="34" charset="0"/>
-                <a:ea typeface="Be Vietnam Pro" pitchFamily="34" charset="-122"/>
-                <a:cs typeface="Be Vietnam Pro" pitchFamily="34" charset="-120"/>
-              </a:rPr>
-              <a:t> thử</a:t>
-            </a:r>
-            <a:r>
-              <a:rPr lang="en-US" sz="2550" dirty="0" spc="20" kern="0">
-                <a:solidFill>
-                  <a:srgbClr val="6B6A66"/>
-                </a:solidFill>
-                <a:latin typeface="Be Vietnam Pro" pitchFamily="34" charset="0"/>
-                <a:ea typeface="Be Vietnam Pro" pitchFamily="34" charset="-122"/>
-                <a:cs typeface="Be Vietnam Pro" pitchFamily="34" charset="-120"/>
-              </a:rPr>
-              <a:t> từng</a:t>
-            </a:r>
-            <a:r>
-              <a:rPr lang="en-US" sz="2550" dirty="0" spc="0" kern="0">
-                <a:solidFill>
-                  <a:srgbClr val="6B6A66"/>
-                </a:solidFill>
-                <a:latin typeface="Be Vietnam Pro" pitchFamily="34" charset="0"/>
-                <a:ea typeface="Be Vietnam Pro" pitchFamily="34" charset="-122"/>
-                <a:cs typeface="Be Vietnam Pro" pitchFamily="34" charset="-120"/>
-              </a:rPr>
-              <a:t> tùy chọn.</a:t>
+              <a:t> thử.</a:t>
             </a:r>
             <a:endParaRPr lang="en-US" sz="2550" dirty="0"/>
           </a:p>
@@ -4895,15 +4462,15 @@
               <a:t>Hai</a:t>
             </a:r>
             <a:r>
-              <a:rPr lang="en-US" sz="2250" dirty="0" spc="-10" kern="0">
-                <a:solidFill>
-                  <a:srgbClr val="14161C"/>
-                </a:solidFill>
-                <a:latin typeface="Be Vietnam Pro" pitchFamily="34" charset="0"/>
-                <a:ea typeface="Be Vietnam Pro" pitchFamily="34" charset="-122"/>
-                <a:cs typeface="Be Vietnam Pro" pitchFamily="34" charset="-120"/>
-              </a:rPr>
-              <a:t> tầng</a:t>
+              <a:rPr lang="en-US" sz="2250" dirty="0" spc="-7" kern="0">
+                <a:solidFill>
+                  <a:srgbClr val="14161C"/>
+                </a:solidFill>
+                <a:latin typeface="Be Vietnam Pro" pitchFamily="34" charset="0"/>
+                <a:ea typeface="Be Vietnam Pro" pitchFamily="34" charset="-122"/>
+                <a:cs typeface="Be Vietnam Pro" pitchFamily="34" charset="-120"/>
+              </a:rPr>
+              <a:t> tầng:</a:t>
             </a:r>
             <a:r>
               <a:rPr lang="en-US" sz="2250" dirty="0" spc="1" kern="0">
@@ -4914,50 +4481,6 @@
                 <a:ea typeface="Be Vietnam Pro" pitchFamily="34" charset="-122"/>
                 <a:cs typeface="Be Vietnam Pro" pitchFamily="34" charset="-120"/>
               </a:rPr>
-              <a:t> không</a:t>
-            </a:r>
-            <a:r>
-              <a:rPr lang="en-US" sz="2250" dirty="0" spc="0" kern="0">
-                <a:solidFill>
-                  <a:srgbClr val="14161C"/>
-                </a:solidFill>
-                <a:latin typeface="Be Vietnam Pro" pitchFamily="34" charset="0"/>
-                <a:ea typeface="Be Vietnam Pro" pitchFamily="34" charset="-122"/>
-                <a:cs typeface="Be Vietnam Pro" pitchFamily="34" charset="-120"/>
-              </a:rPr>
-              <a:t> phải</a:t>
-            </a:r>
-            <a:r>
-              <a:rPr lang="en-US" sz="2250" dirty="0" spc="2" kern="0">
-                <a:solidFill>
-                  <a:srgbClr val="14161C"/>
-                </a:solidFill>
-                <a:latin typeface="Be Vietnam Pro" pitchFamily="34" charset="0"/>
-                <a:ea typeface="Be Vietnam Pro" pitchFamily="34" charset="-122"/>
-                <a:cs typeface="Be Vietnam Pro" pitchFamily="34" charset="-120"/>
-              </a:rPr>
-              <a:t> tùy</a:t>
-            </a:r>
-            <a:r>
-              <a:rPr lang="en-US" sz="2250" dirty="0" spc="4" kern="0">
-                <a:solidFill>
-                  <a:srgbClr val="14161C"/>
-                </a:solidFill>
-                <a:latin typeface="Be Vietnam Pro" pitchFamily="34" charset="0"/>
-                <a:ea typeface="Be Vietnam Pro" pitchFamily="34" charset="-122"/>
-                <a:cs typeface="Be Vietnam Pro" pitchFamily="34" charset="-120"/>
-              </a:rPr>
-              <a:t> chọn:</a:t>
-            </a:r>
-            <a:r>
-              <a:rPr lang="en-US" sz="2250" dirty="0" spc="0" kern="0">
-                <a:solidFill>
-                  <a:srgbClr val="14161C"/>
-                </a:solidFill>
-                <a:latin typeface="Be Vietnam Pro" pitchFamily="34" charset="0"/>
-                <a:ea typeface="Be Vietnam Pro" pitchFamily="34" charset="-122"/>
-                <a:cs typeface="Be Vietnam Pro" pitchFamily="34" charset="-120"/>
-              </a:rPr>
               <a:t> bộ</a:t>
             </a:r>
             <a:r>
@@ -5005,18 +4528,7 @@
               <a:t> trình</a:t>
             </a:r>
             <a:r>
-              <a:rPr lang="en-US" sz="2250" dirty="0" spc="20" kern="0">
-                <a:solidFill>
-                  <a:srgbClr val="14161C"/>
-                </a:solidFill>
-                <a:latin typeface="Be Vietnam Pro" pitchFamily="34" charset="0"/>
-                <a:ea typeface="Be Vietnam Pro" pitchFamily="34" charset="-122"/>
-                <a:cs typeface="Be Vietnam Pro" pitchFamily="34" charset="-120"/>
-              </a:rPr>
-              <a:t> đứng</a:t>
-            </a:r>
-            <a:r>
-              <a:rPr lang="en-US" sz="2250" dirty="0" spc="7" kern="0">
+              <a:rPr lang="en-US" sz="2250" dirty="0" spc="6" kern="0">
                 <a:solidFill>
                   <a:srgbClr val="14161C"/>
                 </a:solidFill>
@@ -6819,7 +6331,7 @@
               <a:t> lấy</a:t>
             </a:r>
             <a:r>
-              <a:rPr lang="en-US" sz="2100" dirty="0" spc="-2" kern="0">
+              <a:rPr lang="en-US" sz="2100" dirty="0" spc="-1" kern="0">
                 <a:solidFill>
                   <a:srgbClr val="9AA0B5"/>
                 </a:solidFill>
@@ -6827,10 +6339,10 @@
                 <a:ea typeface="Be Vietnam Pro" pitchFamily="34" charset="-122"/>
                 <a:cs typeface="Be Vietnam Pro" pitchFamily="34" charset="-120"/>
               </a:rPr>
-              <a:t> mẫu</a:t>
-            </a:r>
-            <a:r>
-              <a:rPr lang="en-US" sz="2100" dirty="0" spc="2" kern="0">
+              <a:t> mẫu:</a:t>
+            </a:r>
+            <a:r>
+              <a:rPr lang="en-US" sz="2100" dirty="0" spc="-4" kern="0">
                 <a:solidFill>
                   <a:srgbClr val="9AA0B5"/>
                 </a:solidFill>
@@ -6838,10 +6350,10 @@
                 <a:ea typeface="Be Vietnam Pro" pitchFamily="34" charset="-122"/>
                 <a:cs typeface="Be Vietnam Pro" pitchFamily="34" charset="-120"/>
               </a:rPr>
-              <a:t> nên</a:t>
-            </a:r>
-            <a:r>
-              <a:rPr lang="en-US" sz="2100" dirty="0" spc="-1" kern="0">
+              <a:t> lặp</a:t>
+            </a:r>
+            <a:r>
+              <a:rPr lang="en-US" sz="2100" dirty="0" spc="-11" kern="0">
                 <a:solidFill>
                   <a:srgbClr val="9AA0B5"/>
                 </a:solidFill>
@@ -6849,10 +6361,10 @@
                 <a:ea typeface="Be Vietnam Pro" pitchFamily="34" charset="-122"/>
                 <a:cs typeface="Be Vietnam Pro" pitchFamily="34" charset="-120"/>
               </a:rPr>
-              <a:t> không</a:t>
-            </a:r>
-            <a:r>
-              <a:rPr lang="en-US" sz="2100" dirty="0" spc="-15" kern="0">
+              <a:t> vòng</a:t>
+            </a:r>
+            <a:r>
+              <a:rPr lang="en-US" sz="2100" dirty="0" spc="-12" kern="0">
                 <a:solidFill>
                   <a:srgbClr val="9AA0B5"/>
                 </a:solidFill>
@@ -6860,10 +6372,10 @@
                 <a:ea typeface="Be Vietnam Pro" pitchFamily="34" charset="-122"/>
                 <a:cs typeface="Be Vietnam Pro" pitchFamily="34" charset="-120"/>
               </a:rPr>
-              <a:t> về</a:t>
-            </a:r>
-            <a:r>
-              <a:rPr lang="en-US" sz="2100" dirty="0" spc="-5" kern="0">
+              <a:t> vẫn</a:t>
+            </a:r>
+            <a:r>
+              <a:rPr lang="en-US" sz="2100" dirty="0" spc="0" kern="0">
                 <a:solidFill>
                   <a:srgbClr val="9AA0B5"/>
                 </a:solidFill>
@@ -6871,117 +6383,7 @@
                 <a:ea typeface="Be Vietnam Pro" pitchFamily="34" charset="-122"/>
                 <a:cs typeface="Be Vietnam Pro" pitchFamily="34" charset="-120"/>
               </a:rPr>
-              <a:t> 0%</a:t>
-            </a:r>
-            <a:r>
-              <a:rPr lang="en-US" sz="2100" dirty="0" spc="1" kern="0">
-                <a:solidFill>
-                  <a:srgbClr val="9AA0B5"/>
-                </a:solidFill>
-                <a:latin typeface="Be Vietnam Pro" pitchFamily="34" charset="0"/>
-                <a:ea typeface="Be Vietnam Pro" pitchFamily="34" charset="-122"/>
-                <a:cs typeface="Be Vietnam Pro" pitchFamily="34" charset="-120"/>
-              </a:rPr>
-              <a:t> khi</a:t>
-            </a:r>
-            <a:r>
-              <a:rPr lang="en-US" sz="2100" dirty="0" spc="-4" kern="0">
-                <a:solidFill>
-                  <a:srgbClr val="9AA0B5"/>
-                </a:solidFill>
-                <a:latin typeface="Be Vietnam Pro" pitchFamily="34" charset="0"/>
-                <a:ea typeface="Be Vietnam Pro" pitchFamily="34" charset="-122"/>
-                <a:cs typeface="Be Vietnam Pro" pitchFamily="34" charset="-120"/>
-              </a:rPr>
-              <a:t> lặp</a:t>
-            </a:r>
-            <a:r>
-              <a:rPr lang="en-US" sz="2100" dirty="0" spc="-9" kern="0">
-                <a:solidFill>
-                  <a:srgbClr val="9AA0B5"/>
-                </a:solidFill>
-                <a:latin typeface="Be Vietnam Pro" pitchFamily="34" charset="0"/>
-                <a:ea typeface="Be Vietnam Pro" pitchFamily="34" charset="-122"/>
-                <a:cs typeface="Be Vietnam Pro" pitchFamily="34" charset="-120"/>
-              </a:rPr>
-              <a:t> vòng.</a:t>
-            </a:r>
-            <a:r>
-              <a:rPr lang="en-US" sz="2100" dirty="0" spc="-2" kern="0">
-                <a:solidFill>
-                  <a:srgbClr val="9AA0B5"/>
-                </a:solidFill>
-                <a:latin typeface="Be Vietnam Pro" pitchFamily="34" charset="0"/>
-                <a:ea typeface="Be Vietnam Pro" pitchFamily="34" charset="-122"/>
-                <a:cs typeface="Be Vietnam Pro" pitchFamily="34" charset="-120"/>
-              </a:rPr>
-              <a:t> Khoảng</a:t>
-            </a:r>
-            <a:r>
-              <a:rPr lang="en-US" sz="2100" dirty="0" spc="-1" kern="0">
-                <a:solidFill>
-                  <a:srgbClr val="9AA0B5"/>
-                </a:solidFill>
-                <a:latin typeface="Be Vietnam Pro" pitchFamily="34" charset="0"/>
-                <a:ea typeface="Be Vietnam Pro" pitchFamily="34" charset="-122"/>
-                <a:cs typeface="Be Vietnam Pro" pitchFamily="34" charset="-120"/>
-              </a:rPr>
-              <a:t> 2.950</a:t>
-            </a:r>
-            <a:r>
-              <a:rPr lang="en-US" sz="2100" dirty="0" spc="-4" kern="0">
-                <a:solidFill>
-                  <a:srgbClr val="9AA0B5"/>
-                </a:solidFill>
-                <a:latin typeface="Be Vietnam Pro" pitchFamily="34" charset="0"/>
-                <a:ea typeface="Be Vietnam Pro" pitchFamily="34" charset="-122"/>
-                <a:cs typeface="Be Vietnam Pro" pitchFamily="34" charset="-120"/>
-              </a:rPr>
-              <a:t> khóa 1.000</a:t>
-            </a:r>
-            <a:r>
-              <a:rPr lang="en-US" sz="2100" dirty="0" spc="-18" kern="0">
-                <a:solidFill>
-                  <a:srgbClr val="9AA0B5"/>
-                </a:solidFill>
-                <a:latin typeface="Be Vietnam Pro" pitchFamily="34" charset="0"/>
-                <a:ea typeface="Be Vietnam Pro" pitchFamily="34" charset="-122"/>
-                <a:cs typeface="Be Vietnam Pro" pitchFamily="34" charset="-120"/>
-              </a:rPr>
-              <a:t> byte</a:t>
-            </a:r>
-            <a:r>
-              <a:rPr lang="en-US" sz="2100" dirty="0" spc="7" kern="0">
-                <a:solidFill>
-                  <a:srgbClr val="9AA0B5"/>
-                </a:solidFill>
-                <a:latin typeface="Be Vietnam Pro" pitchFamily="34" charset="0"/>
-                <a:ea typeface="Be Vietnam Pro" pitchFamily="34" charset="-122"/>
-                <a:cs typeface="Be Vietnam Pro" pitchFamily="34" charset="-120"/>
-              </a:rPr>
-              <a:t> vừa</a:t>
-            </a:r>
-            <a:r>
-              <a:rPr lang="en-US" sz="2100" dirty="0" spc="-1" kern="0">
-                <a:solidFill>
-                  <a:srgbClr val="9AA0B5"/>
-                </a:solidFill>
-                <a:latin typeface="Be Vietnam Pro" pitchFamily="34" charset="0"/>
-                <a:ea typeface="Be Vietnam Pro" pitchFamily="34" charset="-122"/>
-                <a:cs typeface="Be Vietnam Pro" pitchFamily="34" charset="-120"/>
-              </a:rPr>
-              <a:t> 4</a:t>
-            </a:r>
-            <a:r>
-              <a:rPr lang="en-US" sz="2100" dirty="0" spc="1" kern="0">
-                <a:solidFill>
-                  <a:srgbClr val="9AA0B5"/>
-                </a:solidFill>
-                <a:latin typeface="Be Vietnam Pro" pitchFamily="34" charset="0"/>
-                <a:ea typeface="Be Vietnam Pro" pitchFamily="34" charset="-122"/>
-                <a:cs typeface="Be Vietnam Pro" pitchFamily="34" charset="-120"/>
-              </a:rPr>
-              <a:t> MB.</a:t>
+              <a:t> trúng.</a:t>
             </a:r>
             <a:endParaRPr lang="en-US" sz="2100" dirty="0"/>
           </a:p>
@@ -7660,18 +7062,51 @@
                 <a:ea typeface="Be Vietnam Pro" pitchFamily="34" charset="-122"/>
                 <a:cs typeface="Be Vietnam Pro" pitchFamily="34" charset="-120"/>
               </a:rPr>
-              <a:t>lệnh ghi</a:t>
-            </a:r>
-            <a:r>
-              <a:rPr lang="en-US" sz="2400" dirty="0" spc="2" kern="0">
-                <a:solidFill>
-                  <a:srgbClr val="14161C"/>
-                </a:solidFill>
-                <a:latin typeface="Be Vietnam Pro" pitchFamily="34" charset="0"/>
-                <a:ea typeface="Be Vietnam Pro" pitchFamily="34" charset="-122"/>
-                <a:cs typeface="Be Vietnam Pro" pitchFamily="34" charset="-120"/>
-              </a:rPr>
-              <a:t> bị</a:t>
+              <a:t>lệnh ghi lỗi</a:t>
+            </a:r>
+            <a:r>
+              <a:rPr lang="en-US" sz="2400" dirty="0" spc="-2" kern="0">
+                <a:solidFill>
+                  <a:srgbClr val="14161C"/>
+                </a:solidFill>
+                <a:latin typeface="Be Vietnam Pro" pitchFamily="34" charset="0"/>
+                <a:ea typeface="Be Vietnam Pro" pitchFamily="34" charset="-122"/>
+                <a:cs typeface="Be Vietnam Pro" pitchFamily="34" charset="-120"/>
+              </a:rPr>
+              <a:t> OOM,</a:t>
+            </a:r>
+            <a:r>
+              <a:rPr lang="en-US" sz="2400" dirty="0" spc="4" kern="0">
+                <a:solidFill>
+                  <a:srgbClr val="14161C"/>
+                </a:solidFill>
+                <a:latin typeface="Be Vietnam Pro" pitchFamily="34" charset="0"/>
+                <a:ea typeface="Be Vietnam Pro" pitchFamily="34" charset="-122"/>
+                <a:cs typeface="Be Vietnam Pro" pitchFamily="34" charset="-120"/>
+              </a:rPr>
+              <a:t> dù</a:t>
+            </a:r>
+            <a:r>
+              <a:rPr lang="en-US" sz="2400" dirty="0" spc="-7" kern="0">
+                <a:solidFill>
+                  <a:srgbClr val="14161C"/>
+                </a:solidFill>
+                <a:latin typeface="Be Vietnam Pro" pitchFamily="34" charset="0"/>
+                <a:ea typeface="Be Vietnam Pro" pitchFamily="34" charset="-122"/>
+                <a:cs typeface="Be Vietnam Pro" pitchFamily="34" charset="-120"/>
+              </a:rPr>
+              <a:t> tỷ</a:t>
+            </a:r>
+            <a:r>
+              <a:rPr lang="en-US" sz="2400" dirty="0" spc="0" kern="0">
+                <a:solidFill>
+                  <a:srgbClr val="14161C"/>
+                </a:solidFill>
+                <a:latin typeface="Be Vietnam Pro" pitchFamily="34" charset="0"/>
+                <a:ea typeface="Be Vietnam Pro" pitchFamily="34" charset="-122"/>
+                <a:cs typeface="Be Vietnam Pro" pitchFamily="34" charset="-120"/>
+              </a:rPr>
+              <a:t> lệ</a:t>
             </a:r>
             <a:r>
               <a:rPr lang="en-US" sz="2400" dirty="0" spc="3" kern="0">
@@ -7682,109 +7117,10 @@
                 <a:ea typeface="Be Vietnam Pro" pitchFamily="34" charset="-122"/>
                 <a:cs typeface="Be Vietnam Pro" pitchFamily="34" charset="-120"/>
               </a:rPr>
-              <a:t> từ</a:t>
-            </a:r>
-            <a:r>
-              <a:rPr lang="en-US" sz="2400" dirty="0" spc="-1" kern="0">
-                <a:solidFill>
-                  <a:srgbClr val="14161C"/>
-                </a:solidFill>
-                <a:latin typeface="Be Vietnam Pro" pitchFamily="34" charset="0"/>
-                <a:ea typeface="Be Vietnam Pro" pitchFamily="34" charset="-122"/>
-                <a:cs typeface="Be Vietnam Pro" pitchFamily="34" charset="-120"/>
-              </a:rPr>
-              <a:t> chối</a:t>
-            </a:r>
-            <a:r>
-              <a:rPr lang="en-US" sz="2400" dirty="0" spc="-13" kern="0">
-                <a:solidFill>
-                  <a:srgbClr val="14161C"/>
-                </a:solidFill>
-                <a:latin typeface="Be Vietnam Pro" pitchFamily="34" charset="0"/>
-                <a:ea typeface="Be Vietnam Pro" pitchFamily="34" charset="-122"/>
-                <a:cs typeface="Be Vietnam Pro" pitchFamily="34" charset="-120"/>
-              </a:rPr>
-              <a:t> với</a:t>
+              <a:t> trúng</a:t>
             </a:r>
             <a:r>
               <a:rPr lang="en-US" sz="2400" dirty="0" spc="0" kern="0">
-                <a:solidFill>
-                  <a:srgbClr val="14161C"/>
-                </a:solidFill>
-                <a:latin typeface="Be Vietnam Pro" pitchFamily="34" charset="0"/>
-                <a:ea typeface="Be Vietnam Pro" pitchFamily="34" charset="-122"/>
-                <a:cs typeface="Be Vietnam Pro" pitchFamily="34" charset="-120"/>
-              </a:rPr>
-              <a:t> lỗi</a:t>
-            </a:r>
-            <a:r>
-              <a:rPr lang="en-US" sz="2400" dirty="0" spc="-2" kern="0">
-                <a:solidFill>
-                  <a:srgbClr val="14161C"/>
-                </a:solidFill>
-                <a:latin typeface="Be Vietnam Pro" pitchFamily="34" charset="0"/>
-                <a:ea typeface="Be Vietnam Pro" pitchFamily="34" charset="-122"/>
-                <a:cs typeface="Be Vietnam Pro" pitchFamily="34" charset="-120"/>
-              </a:rPr>
-              <a:t> OOM,</a:t>
-            </a:r>
-            <a:r>
-              <a:rPr lang="en-US" sz="2400" dirty="0" spc="5" kern="0">
-                <a:solidFill>
-                  <a:srgbClr val="14161C"/>
-                </a:solidFill>
-                <a:latin typeface="Be Vietnam Pro" pitchFamily="34" charset="0"/>
-                <a:ea typeface="Be Vietnam Pro" pitchFamily="34" charset="-122"/>
-                <a:cs typeface="Be Vietnam Pro" pitchFamily="34" charset="-120"/>
-              </a:rPr>
-              <a:t> mà</a:t>
-            </a:r>
-            <a:r>
-              <a:rPr lang="en-US" sz="2400" dirty="0" spc="-7" kern="0">
-                <a:solidFill>
-                  <a:srgbClr val="14161C"/>
-                </a:solidFill>
-                <a:latin typeface="Be Vietnam Pro" pitchFamily="34" charset="0"/>
-                <a:ea typeface="Be Vietnam Pro" pitchFamily="34" charset="-122"/>
-                <a:cs typeface="Be Vietnam Pro" pitchFamily="34" charset="-120"/>
-              </a:rPr>
-              <a:t> tỷ</a:t>
-            </a:r>
-            <a:r>
-              <a:rPr lang="en-US" sz="2400" dirty="0" spc="0" kern="0">
-                <a:solidFill>
-                  <a:srgbClr val="14161C"/>
-                </a:solidFill>
-                <a:latin typeface="Be Vietnam Pro" pitchFamily="34" charset="0"/>
-                <a:ea typeface="Be Vietnam Pro" pitchFamily="34" charset="-122"/>
-                <a:cs typeface="Be Vietnam Pro" pitchFamily="34" charset="-120"/>
-              </a:rPr>
-              <a:t> lệ</a:t>
-            </a:r>
-            <a:r>
-              <a:rPr lang="en-US" sz="2400" dirty="0" spc="3" kern="0">
-                <a:solidFill>
-                  <a:srgbClr val="14161C"/>
-                </a:solidFill>
-                <a:latin typeface="Be Vietnam Pro" pitchFamily="34" charset="0"/>
-                <a:ea typeface="Be Vietnam Pro" pitchFamily="34" charset="-122"/>
-                <a:cs typeface="Be Vietnam Pro" pitchFamily="34" charset="-120"/>
-              </a:rPr>
-              <a:t> trúng</a:t>
-            </a:r>
-            <a:r>
-              <a:rPr lang="en-US" sz="2400" dirty="0" spc="-11" kern="0">
-                <a:solidFill>
-                  <a:srgbClr val="14161C"/>
-                </a:solidFill>
-                <a:latin typeface="Be Vietnam Pro" pitchFamily="34" charset="0"/>
-                <a:ea typeface="Be Vietnam Pro" pitchFamily="34" charset="-122"/>
-                <a:cs typeface="Be Vietnam Pro" pitchFamily="34" charset="-120"/>
-              </a:rPr>
-              <a:t> vẫn</a:t>
-            </a:r>
-            <a:r>
-              <a:rPr lang="en-US" sz="2400" dirty="0" spc="-1" kern="0">
                 <a:solidFill>
                   <a:srgbClr val="14161C"/>
                 </a:solidFill>
@@ -8182,48 +7518,15 @@
               <a:t> như</a:t>
             </a:r>
             <a:r>
-              <a:rPr lang="en-US" sz="2250" dirty="0" spc="-7" kern="0">
-                <a:solidFill>
-                  <a:srgbClr val="14161C"/>
-                </a:solidFill>
-                <a:latin typeface="Be Vietnam Pro" pitchFamily="34" charset="0"/>
-                <a:ea typeface="Be Vietnam Pro" pitchFamily="34" charset="-122"/>
-                <a:cs typeface="Be Vietnam Pro" pitchFamily="34" charset="-120"/>
-              </a:rPr>
-              <a:t> noeviction,</a:t>
-            </a:r>
-            <a:r>
-              <a:rPr lang="en-US" sz="2250" dirty="0" spc="3" kern="0">
-                <a:solidFill>
-                  <a:srgbClr val="14161C"/>
-                </a:solidFill>
-                <a:latin typeface="Be Vietnam Pro" pitchFamily="34" charset="0"/>
-                <a:ea typeface="Be Vietnam Pro" pitchFamily="34" charset="-122"/>
-                <a:cs typeface="Be Vietnam Pro" pitchFamily="34" charset="-120"/>
-              </a:rPr>
-              <a:t> cùng</a:t>
-            </a:r>
-            <a:r>
-              <a:rPr lang="en-US" sz="2250" dirty="0" spc="4" kern="0">
-                <a:solidFill>
-                  <a:srgbClr val="14161C"/>
-                </a:solidFill>
-                <a:latin typeface="Be Vietnam Pro" pitchFamily="34" charset="0"/>
-                <a:ea typeface="Be Vietnam Pro" pitchFamily="34" charset="-122"/>
-                <a:cs typeface="Be Vietnam Pro" pitchFamily="34" charset="-120"/>
-              </a:rPr>
-              <a:t> 8.981</a:t>
-            </a:r>
-            <a:r>
-              <a:rPr lang="en-US" sz="2250" dirty="0" spc="2" kern="0">
-                <a:solidFill>
-                  <a:srgbClr val="14161C"/>
-                </a:solidFill>
-                <a:latin typeface="Be Vietnam Pro" pitchFamily="34" charset="0"/>
-                <a:ea typeface="Be Vietnam Pro" pitchFamily="34" charset="-122"/>
-                <a:cs typeface="Be Vietnam Pro" pitchFamily="34" charset="-120"/>
-              </a:rPr>
-              <a:t> lỗi.</a:t>
+              <a:rPr lang="en-US" sz="2250" dirty="0" spc="-6" kern="0">
+                <a:solidFill>
+                  <a:srgbClr val="14161C"/>
+                </a:solidFill>
+                <a:latin typeface="Be Vietnam Pro" pitchFamily="34" charset="0"/>
+                <a:ea typeface="Be Vietnam Pro" pitchFamily="34" charset="-122"/>
+                <a:cs typeface="Be Vietnam Pro" pitchFamily="34" charset="-120"/>
+              </a:rPr>
+              <a:t> noeviction.</a:t>
             </a:r>
             <a:endParaRPr lang="en-US" sz="2250" dirty="0"/>
           </a:p>
@@ -10445,7 +9748,7 @@
               <a:buNone/>
             </a:pPr>
             <a:r>
-              <a:rPr lang="en-US" sz="2850" dirty="0" spc="-11" kern="0">
+              <a:rPr lang="en-US" sz="2850" dirty="0" spc="-1" kern="0">
                 <a:solidFill>
                   <a:srgbClr val="F3EEE3"/>
                 </a:solidFill>
@@ -10453,10 +9756,10 @@
                 <a:ea typeface="Be Vietnam Pro" pitchFamily="34" charset="-122"/>
                 <a:cs typeface="Be Vietnam Pro" pitchFamily="34" charset="-120"/>
               </a:rPr>
-              <a:t>Một máy</a:t>
-            </a:r>
-            <a:r>
-              <a:rPr lang="en-US" sz="2850" dirty="0" spc="-26" kern="0">
+              <a:t>Phiên có hạn</a:t>
+            </a:r>
+            <a:r>
+              <a:rPr lang="en-US" sz="2850" dirty="0" spc="-6" kern="0">
                 <a:solidFill>
                   <a:srgbClr val="F3EEE3"/>
                 </a:solidFill>
@@ -10464,7 +9767,7 @@
                 <a:ea typeface="Be Vietnam Pro" pitchFamily="34" charset="-122"/>
                 <a:cs typeface="Be Vietnam Pro" pitchFamily="34" charset="-120"/>
               </a:rPr>
-              <a:t> Redis</a:t>
+              <a:t> sống,</a:t>
             </a:r>
             <a:r>
               <a:rPr lang="en-US" sz="2850" dirty="0" spc="0" kern="0">
@@ -10475,7 +9778,7 @@
                 <a:ea typeface="Be Vietnam Pro" pitchFamily="34" charset="-122"/>
                 <a:cs typeface="Be Vietnam Pro" pitchFamily="34" charset="-120"/>
               </a:rPr>
-              <a:t> giữ</a:t>
+              <a:t> danh</a:t>
             </a:r>
             <a:r>
               <a:rPr lang="en-US" sz="2850" dirty="0" spc="-1" kern="0">
@@ -10486,10 +9789,10 @@
                 <a:ea typeface="Be Vietnam Pro" pitchFamily="34" charset="-122"/>
                 <a:cs typeface="Be Vietnam Pro" pitchFamily="34" charset="-120"/>
               </a:rPr>
-              <a:t> phiên</a:t>
-            </a:r>
-            <a:r>
-              <a:rPr lang="en-US" sz="2850" dirty="0" spc="11" kern="0">
+              <a:t> mục</a:t>
+            </a:r>
+            <a:r>
+              <a:rPr lang="en-US" sz="2850" dirty="0" spc="-2" kern="0">
                 <a:solidFill>
                   <a:srgbClr val="F3EEE3"/>
                 </a:solidFill>
@@ -10497,117 +9800,7 @@
                 <a:ea typeface="Be Vietnam Pro" pitchFamily="34" charset="-122"/>
                 <a:cs typeface="Be Vietnam Pro" pitchFamily="34" charset="-120"/>
               </a:rPr>
-              <a:t> đăng</a:t>
-            </a:r>
-            <a:r>
-              <a:rPr lang="en-US" sz="2850" dirty="0" spc="-2" kern="0">
-                <a:solidFill>
-                  <a:srgbClr val="F3EEE3"/>
-                </a:solidFill>
-                <a:latin typeface="Be Vietnam Pro" pitchFamily="34" charset="0"/>
-                <a:ea typeface="Be Vietnam Pro" pitchFamily="34" charset="-122"/>
-                <a:cs typeface="Be Vietnam Pro" pitchFamily="34" charset="-120"/>
-              </a:rPr>
-              <a:t> nhập</a:t>
-            </a:r>
-            <a:r>
-              <a:rPr lang="en-US" sz="2850" dirty="0" spc="0" kern="0">
-                <a:solidFill>
-                  <a:srgbClr val="F3EEE3"/>
-                </a:solidFill>
-                <a:latin typeface="Be Vietnam Pro" pitchFamily="34" charset="0"/>
-                <a:ea typeface="Be Vietnam Pro" pitchFamily="34" charset="-122"/>
-                <a:cs typeface="Be Vietnam Pro" pitchFamily="34" charset="-120"/>
-              </a:rPr>
-              <a:t> (có hạn</a:t>
-            </a:r>
-            <a:r>
-              <a:rPr lang="en-US" sz="2850" dirty="0" spc="-6" kern="0">
-                <a:solidFill>
-                  <a:srgbClr val="F3EEE3"/>
-                </a:solidFill>
-                <a:latin typeface="Be Vietnam Pro" pitchFamily="34" charset="0"/>
-                <a:ea typeface="Be Vietnam Pro" pitchFamily="34" charset="-122"/>
-                <a:cs typeface="Be Vietnam Pro" pitchFamily="34" charset="-120"/>
-              </a:rPr>
-              <a:t> sống)</a:t>
-            </a:r>
-            <a:r>
-              <a:rPr lang="en-US" sz="2850" dirty="0" spc="-17" kern="0">
-                <a:solidFill>
-                  <a:srgbClr val="F3EEE3"/>
-                </a:solidFill>
-                <a:latin typeface="Be Vietnam Pro" pitchFamily="34" charset="0"/>
-                <a:ea typeface="Be Vietnam Pro" pitchFamily="34" charset="-122"/>
-                <a:cs typeface="Be Vietnam Pro" pitchFamily="34" charset="-120"/>
-              </a:rPr>
-              <a:t> và</a:t>
-            </a:r>
-            <a:r>
-              <a:rPr lang="en-US" sz="2850" dirty="0" spc="0" kern="0">
-                <a:solidFill>
-                  <a:srgbClr val="F3EEE3"/>
-                </a:solidFill>
-                <a:latin typeface="Be Vietnam Pro" pitchFamily="34" charset="0"/>
-                <a:ea typeface="Be Vietnam Pro" pitchFamily="34" charset="-122"/>
-                <a:cs typeface="Be Vietnam Pro" pitchFamily="34" charset="-120"/>
-              </a:rPr>
-              <a:t> danh</a:t>
-            </a:r>
-            <a:r>
-              <a:rPr lang="en-US" sz="2850" dirty="0" spc="-1" kern="0">
-                <a:solidFill>
-                  <a:srgbClr val="F3EEE3"/>
-                </a:solidFill>
-                <a:latin typeface="Be Vietnam Pro" pitchFamily="34" charset="0"/>
-                <a:ea typeface="Be Vietnam Pro" pitchFamily="34" charset="-122"/>
-                <a:cs typeface="Be Vietnam Pro" pitchFamily="34" charset="-120"/>
-              </a:rPr>
-              <a:t> mục</a:t>
-            </a:r>
-            <a:r>
-              <a:rPr lang="en-US" sz="2850" dirty="0" spc="-2" kern="0">
-                <a:solidFill>
-                  <a:srgbClr val="F3EEE3"/>
-                </a:solidFill>
-                <a:latin typeface="Be Vietnam Pro" pitchFamily="34" charset="0"/>
-                <a:ea typeface="Be Vietnam Pro" pitchFamily="34" charset="-122"/>
-                <a:cs typeface="Be Vietnam Pro" pitchFamily="34" charset="-120"/>
-              </a:rPr>
-              <a:t> (không</a:t>
-            </a:r>
-            <a:r>
-              <a:rPr lang="en-US" sz="2850" dirty="0" spc="0" kern="0">
-                <a:solidFill>
-                  <a:srgbClr val="F3EEE3"/>
-                </a:solidFill>
-                <a:latin typeface="Be Vietnam Pro" pitchFamily="34" charset="0"/>
-                <a:ea typeface="Be Vietnam Pro" pitchFamily="34" charset="-122"/>
-                <a:cs typeface="Be Vietnam Pro" pitchFamily="34" charset="-120"/>
-              </a:rPr>
-              <a:t> hạn</a:t>
-            </a:r>
-            <a:r>
-              <a:rPr lang="en-US" sz="2850" dirty="0" spc="-5" kern="0">
-                <a:solidFill>
-                  <a:srgbClr val="F3EEE3"/>
-                </a:solidFill>
-                <a:latin typeface="Be Vietnam Pro" pitchFamily="34" charset="0"/>
-                <a:ea typeface="Be Vietnam Pro" pitchFamily="34" charset="-122"/>
-                <a:cs typeface="Be Vietnam Pro" pitchFamily="34" charset="-120"/>
-              </a:rPr>
-              <a:t> sống),</a:t>
-            </a:r>
-            <a:r>
-              <a:rPr lang="en-US" sz="2850" dirty="0" spc="-7" kern="0">
-                <a:solidFill>
-                  <a:srgbClr val="F3EEE3"/>
-                </a:solidFill>
-                <a:latin typeface="Be Vietnam Pro" pitchFamily="34" charset="0"/>
-                <a:ea typeface="Be Vietnam Pro" pitchFamily="34" charset="-122"/>
-                <a:cs typeface="Be Vietnam Pro" pitchFamily="34" charset="-120"/>
-              </a:rPr>
-              <a:t> volatile-lru.</a:t>
+              <a:t> không.</a:t>
             </a:r>
             <a:r>
               <a:rPr lang="en-US" sz="2850" dirty="0" spc="-11" kern="0">
@@ -11279,105 +10472,6 @@
                 <a:cs typeface="Be Vietnam Pro" pitchFamily="34" charset="-120"/>
               </a:rPr>
               <a:t> noeviction.</a:t>
-            </a:r>
-            <a:r>
-              <a:rPr lang="en-US" sz="2250" dirty="0" spc="-51" kern="0">
-                <a:solidFill>
-                  <a:srgbClr val="E4E1D8"/>
-                </a:solidFill>
-                <a:latin typeface="Be Vietnam Pro" pitchFamily="34" charset="0"/>
-                <a:ea typeface="Be Vietnam Pro" pitchFamily="34" charset="-122"/>
-                <a:cs typeface="Be Vietnam Pro" pitchFamily="34" charset="-120"/>
-              </a:rPr>
-              <a:t> Tài</a:t>
-            </a:r>
-            <a:r>
-              <a:rPr lang="en-US" sz="2250" dirty="0" spc="-2" kern="0">
-                <a:solidFill>
-                  <a:srgbClr val="E4E1D8"/>
-                </a:solidFill>
-                <a:latin typeface="Be Vietnam Pro" pitchFamily="34" charset="0"/>
-                <a:ea typeface="Be Vietnam Pro" pitchFamily="34" charset="-122"/>
-                <a:cs typeface="Be Vietnam Pro" pitchFamily="34" charset="-120"/>
-              </a:rPr>
-              <a:t> liệu</a:t>
-            </a:r>
-            <a:r>
-              <a:rPr lang="en-US" sz="2250" dirty="0" spc="-19" kern="0">
-                <a:solidFill>
-                  <a:srgbClr val="E4E1D8"/>
-                </a:solidFill>
-                <a:latin typeface="Be Vietnam Pro" pitchFamily="34" charset="0"/>
-                <a:ea typeface="Be Vietnam Pro" pitchFamily="34" charset="-122"/>
-                <a:cs typeface="Be Vietnam Pro" pitchFamily="34" charset="-120"/>
-              </a:rPr>
-              <a:t> Redis</a:t>
-            </a:r>
-            <a:r>
-              <a:rPr lang="en-US" sz="2250" dirty="0" spc="-11" kern="0">
-                <a:solidFill>
-                  <a:srgbClr val="E4E1D8"/>
-                </a:solidFill>
-                <a:latin typeface="Be Vietnam Pro" pitchFamily="34" charset="0"/>
-                <a:ea typeface="Be Vietnam Pro" pitchFamily="34" charset="-122"/>
-                <a:cs typeface="Be Vietnam Pro" pitchFamily="34" charset="-120"/>
-              </a:rPr>
-              <a:t> gợi</a:t>
-            </a:r>
-            <a:r>
-              <a:rPr lang="en-US" sz="2250" dirty="0" spc="2" kern="0">
-                <a:solidFill>
-                  <a:srgbClr val="E4E1D8"/>
-                </a:solidFill>
-                <a:latin typeface="Be Vietnam Pro" pitchFamily="34" charset="0"/>
-                <a:ea typeface="Be Vietnam Pro" pitchFamily="34" charset="-122"/>
-                <a:cs typeface="Be Vietnam Pro" pitchFamily="34" charset="-120"/>
-              </a:rPr>
-              <a:t> ý</a:t>
-            </a:r>
-            <a:r>
-              <a:rPr lang="en-US" sz="2250" dirty="0" spc="-8" kern="0">
-                <a:solidFill>
-                  <a:srgbClr val="E4E1D8"/>
-                </a:solidFill>
-                <a:latin typeface="Be Vietnam Pro" pitchFamily="34" charset="0"/>
-                <a:ea typeface="Be Vietnam Pro" pitchFamily="34" charset="-122"/>
-                <a:cs typeface="Be Vietnam Pro" pitchFamily="34" charset="-120"/>
-              </a:rPr>
-              <a:t> tách</a:t>
-            </a:r>
-            <a:r>
-              <a:rPr lang="en-US" sz="2250" dirty="0" spc="0" kern="0">
-                <a:solidFill>
-                  <a:srgbClr val="E4E1D8"/>
-                </a:solidFill>
-                <a:latin typeface="Be Vietnam Pro" pitchFamily="34" charset="0"/>
-                <a:ea typeface="Be Vietnam Pro" pitchFamily="34" charset="-122"/>
-                <a:cs typeface="Be Vietnam Pro" pitchFamily="34" charset="-120"/>
-              </a:rPr>
-              <a:t> thành</a:t>
-            </a:r>
-            <a:r>
-              <a:rPr lang="en-US" sz="2250" dirty="0" spc="-2" kern="0">
-                <a:solidFill>
-                  <a:srgbClr val="E4E1D8"/>
-                </a:solidFill>
-                <a:latin typeface="Be Vietnam Pro" pitchFamily="34" charset="0"/>
-                <a:ea typeface="Be Vietnam Pro" pitchFamily="34" charset="-122"/>
-                <a:cs typeface="Be Vietnam Pro" pitchFamily="34" charset="-120"/>
-              </a:rPr>
-              <a:t> hai</a:t>
-            </a:r>
-            <a:r>
-              <a:rPr lang="en-US" sz="2250" dirty="0" spc="-7" kern="0">
-                <a:solidFill>
-                  <a:srgbClr val="E4E1D8"/>
-                </a:solidFill>
-                <a:latin typeface="Be Vietnam Pro" pitchFamily="34" charset="0"/>
-                <a:ea typeface="Be Vietnam Pro" pitchFamily="34" charset="-122"/>
-                <a:cs typeface="Be Vietnam Pro" pitchFamily="34" charset="-120"/>
-              </a:rPr>
-              <a:t> máy.</a:t>
             </a:r>
             <a:endParaRPr lang="en-US" sz="2250" dirty="0"/>
           </a:p>
@@ -14895,6 +13989,28 @@
               <a:buNone/>
             </a:pPr>
             <a:r>
+              <a:rPr lang="en-US" sz="1800" dirty="0" spc="-3" kern="0">
+                <a:solidFill>
+                  <a:srgbClr val="9AA0B5"/>
+                </a:solidFill>
+                <a:latin typeface="Be Vietnam Pro" pitchFamily="34" charset="0"/>
+                <a:ea typeface="Be Vietnam Pro" pitchFamily="34" charset="-122"/>
+                <a:cs typeface="Be Vietnam Pro" pitchFamily="34" charset="-120"/>
+              </a:rPr>
+              <a:t>Nguồn</a:t>
+            </a:r>
+            <a:r>
+              <a:rPr lang="en-US" sz="1800" dirty="0" spc="-9" kern="0">
+                <a:solidFill>
+                  <a:srgbClr val="9AA0B5"/>
+                </a:solidFill>
+                <a:latin typeface="Be Vietnam Pro" pitchFamily="34" charset="0"/>
+                <a:ea typeface="Be Vietnam Pro" pitchFamily="34" charset="-122"/>
+                <a:cs typeface="Be Vietnam Pro" pitchFamily="34" charset="-120"/>
+              </a:rPr>
+              <a:t> tại</a:t>
+            </a:r>
+            <a:r>
               <a:rPr lang="en-US" sz="1800" dirty="0" spc="-1" kern="0">
                 <a:solidFill>
                   <a:srgbClr val="9AA0B5"/>
@@ -14903,10 +14019,10 @@
                 <a:ea typeface="Be Vietnam Pro" pitchFamily="34" charset="-122"/>
                 <a:cs typeface="Be Vietnam Pro" pitchFamily="34" charset="-120"/>
               </a:rPr>
-              <a:t>Mỗi</a:t>
-            </a:r>
-            <a:r>
-              <a:rPr lang="en-US" sz="1800" dirty="0" spc="-4" kern="0">
+              <a:t> commit</a:t>
+            </a:r>
+            <a:r>
+              <a:rPr lang="en-US" sz="1800" dirty="0" spc="2" kern="0">
                 <a:solidFill>
                   <a:srgbClr val="9AA0B5"/>
                 </a:solidFill>
@@ -14914,10 +14030,10 @@
                 <a:ea typeface="Be Vietnam Pro" pitchFamily="34" charset="-122"/>
                 <a:cs typeface="Be Vietnam Pro" pitchFamily="34" charset="-120"/>
               </a:rPr>
-              <a:t> nguồn</a:t>
-            </a:r>
-            <a:r>
-              <a:rPr lang="en-US" sz="1800" dirty="0" spc="-10" kern="0">
+              <a:t> cố</a:t>
+            </a:r>
+            <a:r>
+              <a:rPr lang="en-US" sz="1800" dirty="0" spc="10" kern="0">
                 <a:solidFill>
                   <a:srgbClr val="9AA0B5"/>
                 </a:solidFill>
@@ -14925,10 +14041,10 @@
                 <a:ea typeface="Be Vietnam Pro" pitchFamily="34" charset="-122"/>
                 <a:cs typeface="Be Vietnam Pro" pitchFamily="34" charset="-120"/>
               </a:rPr>
-              <a:t> tại</a:t>
-            </a:r>
-            <a:r>
-              <a:rPr lang="en-US" sz="1800" dirty="0" spc="-6" kern="0">
+              <a:t> định;</a:t>
+            </a:r>
+            <a:r>
+              <a:rPr lang="en-US" sz="1800" dirty="0" spc="0" kern="0">
                 <a:solidFill>
                   <a:srgbClr val="9AA0B5"/>
                 </a:solidFill>
@@ -14936,10 +14052,10 @@
                 <a:ea typeface="Be Vietnam Pro" pitchFamily="34" charset="-122"/>
                 <a:cs typeface="Be Vietnam Pro" pitchFamily="34" charset="-120"/>
               </a:rPr>
-              <a:t> một</a:t>
-            </a:r>
-            <a:r>
-              <a:rPr lang="en-US" sz="1800" dirty="0" spc="-1" kern="0">
+              <a:t> thử</a:t>
+            </a:r>
+            <a:r>
+              <a:rPr lang="en-US" sz="1800" dirty="0" spc="-15" kern="0">
                 <a:solidFill>
                   <a:srgbClr val="9AA0B5"/>
                 </a:solidFill>
@@ -14947,10 +14063,10 @@
                 <a:ea typeface="Be Vietnam Pro" pitchFamily="34" charset="-122"/>
                 <a:cs typeface="Be Vietnam Pro" pitchFamily="34" charset="-120"/>
               </a:rPr>
-              <a:t> commit</a:t>
-            </a:r>
-            <a:r>
-              <a:rPr lang="en-US" sz="1800" dirty="0" spc="2" kern="0">
+              <a:t> ngày</a:t>
+            </a:r>
+            <a:r>
+              <a:rPr lang="en-US" sz="1800" dirty="0" spc="1" kern="0">
                 <a:solidFill>
                   <a:srgbClr val="9AA0B5"/>
                 </a:solidFill>
@@ -14958,106 +14074,7 @@
                 <a:ea typeface="Be Vietnam Pro" pitchFamily="34" charset="-122"/>
                 <a:cs typeface="Be Vietnam Pro" pitchFamily="34" charset="-120"/>
               </a:rPr>
-              <a:t> cố</a:t>
-            </a:r>
-            <a:r>
-              <a:rPr lang="en-US" sz="1800" dirty="0" spc="11" kern="0">
-                <a:solidFill>
-                  <a:srgbClr val="9AA0B5"/>
-                </a:solidFill>
-                <a:latin typeface="Be Vietnam Pro" pitchFamily="34" charset="0"/>
-                <a:ea typeface="Be Vietnam Pro" pitchFamily="34" charset="-122"/>
-                <a:cs typeface="Be Vietnam Pro" pitchFamily="34" charset="-120"/>
-              </a:rPr>
-              <a:t> định.</a:t>
-            </a:r>
-            <a:r>
-              <a:rPr lang="en-US" sz="1800" dirty="0" spc="0" kern="0">
-                <a:solidFill>
-                  <a:srgbClr val="9AA0B5"/>
-                </a:solidFill>
-                <a:latin typeface="Be Vietnam Pro" pitchFamily="34" charset="0"/>
-                <a:ea typeface="Be Vietnam Pro" pitchFamily="34" charset="-122"/>
-                <a:cs typeface="Be Vietnam Pro" pitchFamily="34" charset="-120"/>
-              </a:rPr>
-              <a:t> Thử</a:t>
-            </a:r>
-            <a:r>
-              <a:rPr lang="en-US" sz="1800" dirty="0" spc="-15" kern="0">
-                <a:solidFill>
-                  <a:srgbClr val="9AA0B5"/>
-                </a:solidFill>
-                <a:latin typeface="Be Vietnam Pro" pitchFamily="34" charset="0"/>
-                <a:ea typeface="Be Vietnam Pro" pitchFamily="34" charset="-122"/>
-                <a:cs typeface="Be Vietnam Pro" pitchFamily="34" charset="-120"/>
-              </a:rPr>
-              <a:t> ngày</a:t>
-            </a:r>
-            <a:r>
-              <a:rPr lang="en-US" sz="1800" dirty="0" spc="1" kern="0">
-                <a:solidFill>
-                  <a:srgbClr val="9AA0B5"/>
-                </a:solidFill>
-                <a:latin typeface="Be Vietnam Pro" pitchFamily="34" charset="0"/>
-                <a:ea typeface="Be Vietnam Pro" pitchFamily="34" charset="-122"/>
-                <a:cs typeface="Be Vietnam Pro" pitchFamily="34" charset="-120"/>
-              </a:rPr>
               <a:t> 2026-10-18.</a:t>
-            </a:r>
-            <a:r>
-              <a:rPr lang="en-US" sz="1800" dirty="0" spc="-2" kern="0">
-                <a:solidFill>
-                  <a:srgbClr val="9AA0B5"/>
-                </a:solidFill>
-                <a:latin typeface="Be Vietnam Pro" pitchFamily="34" charset="0"/>
-                <a:ea typeface="Be Vietnam Pro" pitchFamily="34" charset="-122"/>
-                <a:cs typeface="Be Vietnam Pro" pitchFamily="34" charset="-120"/>
-              </a:rPr>
-              <a:t> Hình</a:t>
-            </a:r>
-            <a:r>
-              <a:rPr lang="en-US" sz="1800" dirty="0" spc="-5" kern="0">
-                <a:solidFill>
-                  <a:srgbClr val="9AA0B5"/>
-                </a:solidFill>
-                <a:latin typeface="Be Vietnam Pro" pitchFamily="34" charset="0"/>
-                <a:ea typeface="Be Vietnam Pro" pitchFamily="34" charset="-122"/>
-                <a:cs typeface="Be Vietnam Pro" pitchFamily="34" charset="-120"/>
-              </a:rPr>
-              <a:t> thiết</a:t>
-            </a:r>
-            <a:r>
-              <a:rPr lang="en-US" sz="1800" dirty="0" spc="-28" kern="0">
-                <a:solidFill>
-                  <a:srgbClr val="9AA0B5"/>
-                </a:solidFill>
-                <a:latin typeface="Be Vietnam Pro" pitchFamily="34" charset="0"/>
-                <a:ea typeface="Be Vietnam Pro" pitchFamily="34" charset="-122"/>
-                <a:cs typeface="Be Vietnam Pro" pitchFamily="34" charset="-120"/>
-              </a:rPr>
-              <a:t> kế</a:t>
-            </a:r>
-            <a:r>
-              <a:rPr lang="en-US" sz="1800" dirty="0" spc="9" kern="0">
-                <a:solidFill>
-                  <a:srgbClr val="9AA0B5"/>
-                </a:solidFill>
-                <a:latin typeface="Be Vietnam Pro" pitchFamily="34" charset="0"/>
-                <a:ea typeface="Be Vietnam Pro" pitchFamily="34" charset="-122"/>
-                <a:cs typeface="Be Vietnam Pro" pitchFamily="34" charset="-120"/>
-              </a:rPr>
-              <a:t> độc</a:t>
-            </a:r>
-            <a:r>
-              <a:rPr lang="en-US" sz="1800" dirty="0" spc="0" kern="0">
-                <a:solidFill>
-                  <a:srgbClr val="9AA0B5"/>
-                </a:solidFill>
-                <a:latin typeface="Be Vietnam Pro" pitchFamily="34" charset="0"/>
-                <a:ea typeface="Be Vietnam Pro" pitchFamily="34" charset="-122"/>
-                <a:cs typeface="Be Vietnam Pro" pitchFamily="34" charset="-120"/>
-              </a:rPr>
-              <a:t> lập.</a:t>
             </a:r>
             <a:endParaRPr lang="en-US" sz="1800" dirty="0"/>
           </a:p>
